--- a/docs/pptx/whole/ritu-linsubhr-ratio-akikdigo_10pct.pptx
+++ b/docs/pptx/whole/ritu-linsubhr-ratio-akikdigo_10pct.pptx
@@ -2443,7 +2443,7 @@
           </p:nvSpPr>
           <p:spPr>
             <a:xfrm>
-              <a:off x="955490" y="2073503"/>
+              <a:off x="957589" y="2073503"/>
               <a:ext cx="0" cy="3649639"/>
             </a:xfrm>
             <a:custGeom>
@@ -2486,7 +2486,7 @@
           </p:nvSpPr>
           <p:spPr>
             <a:xfrm>
-              <a:off x="1892768" y="2073503"/>
+              <a:off x="1893867" y="2073503"/>
               <a:ext cx="0" cy="3649639"/>
             </a:xfrm>
             <a:custGeom>
@@ -2529,7 +2529,7 @@
           </p:nvSpPr>
           <p:spPr>
             <a:xfrm>
-              <a:off x="2830046" y="2073503"/>
+              <a:off x="2830144" y="2073503"/>
               <a:ext cx="0" cy="3649639"/>
             </a:xfrm>
             <a:custGeom>
@@ -2572,7 +2572,7 @@
           </p:nvSpPr>
           <p:spPr>
             <a:xfrm>
-              <a:off x="3767323" y="2073503"/>
+              <a:off x="3766422" y="2073503"/>
               <a:ext cx="0" cy="3649639"/>
             </a:xfrm>
             <a:custGeom>
@@ -2615,7 +2615,7 @@
           </p:nvSpPr>
           <p:spPr>
             <a:xfrm>
-              <a:off x="4704601" y="2073503"/>
+              <a:off x="4702700" y="2073503"/>
               <a:ext cx="0" cy="3649639"/>
             </a:xfrm>
             <a:custGeom>
@@ -2658,7 +2658,7 @@
           </p:nvSpPr>
           <p:spPr>
             <a:xfrm>
-              <a:off x="5641878" y="2073503"/>
+              <a:off x="5638978" y="2073503"/>
               <a:ext cx="0" cy="3649639"/>
             </a:xfrm>
             <a:custGeom>
@@ -2701,7 +2701,7 @@
           </p:nvSpPr>
           <p:spPr>
             <a:xfrm>
-              <a:off x="6579156" y="2073503"/>
+              <a:off x="6575256" y="2073503"/>
               <a:ext cx="0" cy="3649639"/>
             </a:xfrm>
             <a:custGeom>
@@ -2744,7 +2744,7 @@
           </p:nvSpPr>
           <p:spPr>
             <a:xfrm>
-              <a:off x="7516433" y="2073503"/>
+              <a:off x="7511534" y="2073503"/>
               <a:ext cx="0" cy="3649639"/>
             </a:xfrm>
             <a:custGeom>
@@ -2787,7 +2787,7 @@
           </p:nvSpPr>
           <p:spPr>
             <a:xfrm>
-              <a:off x="8453711" y="2073503"/>
+              <a:off x="8447812" y="2073503"/>
               <a:ext cx="0" cy="3649639"/>
             </a:xfrm>
             <a:custGeom>
@@ -3045,7 +3045,7 @@
           </p:nvSpPr>
           <p:spPr>
             <a:xfrm>
-              <a:off x="1424129" y="2073503"/>
+              <a:off x="1425728" y="2073503"/>
               <a:ext cx="0" cy="3649639"/>
             </a:xfrm>
             <a:custGeom>
@@ -3088,7 +3088,7 @@
           </p:nvSpPr>
           <p:spPr>
             <a:xfrm>
-              <a:off x="2361407" y="2073503"/>
+              <a:off x="2362006" y="2073503"/>
               <a:ext cx="0" cy="3649639"/>
             </a:xfrm>
             <a:custGeom>
@@ -3131,7 +3131,7 @@
           </p:nvSpPr>
           <p:spPr>
             <a:xfrm>
-              <a:off x="3298684" y="2073503"/>
+              <a:off x="3298283" y="2073503"/>
               <a:ext cx="0" cy="3649639"/>
             </a:xfrm>
             <a:custGeom>
@@ -3174,7 +3174,7 @@
           </p:nvSpPr>
           <p:spPr>
             <a:xfrm>
-              <a:off x="4235962" y="2073503"/>
+              <a:off x="4234561" y="2073503"/>
               <a:ext cx="0" cy="3649639"/>
             </a:xfrm>
             <a:custGeom>
@@ -3217,7 +3217,7 @@
           </p:nvSpPr>
           <p:spPr>
             <a:xfrm>
-              <a:off x="5173239" y="2073503"/>
+              <a:off x="5170839" y="2073503"/>
               <a:ext cx="0" cy="3649639"/>
             </a:xfrm>
             <a:custGeom>
@@ -3260,7 +3260,7 @@
           </p:nvSpPr>
           <p:spPr>
             <a:xfrm>
-              <a:off x="6110517" y="2073503"/>
+              <a:off x="6107117" y="2073503"/>
               <a:ext cx="0" cy="3649639"/>
             </a:xfrm>
             <a:custGeom>
@@ -3303,7 +3303,7 @@
           </p:nvSpPr>
           <p:spPr>
             <a:xfrm>
-              <a:off x="7047795" y="2073503"/>
+              <a:off x="7043395" y="2073503"/>
               <a:ext cx="0" cy="3649639"/>
             </a:xfrm>
             <a:custGeom>
@@ -3346,7 +3346,7 @@
           </p:nvSpPr>
           <p:spPr>
             <a:xfrm>
-              <a:off x="7985072" y="2073503"/>
+              <a:off x="7979673" y="2073503"/>
               <a:ext cx="0" cy="3649639"/>
             </a:xfrm>
             <a:custGeom>
@@ -3390,542 +3390,542 @@
           <p:spPr>
             <a:xfrm>
               <a:off x="1172049" y="2073503"/>
-              <a:ext cx="7090630" cy="3466372"/>
+              <a:ext cx="7090630" cy="3465741"/>
             </a:xfrm>
             <a:custGeom>
               <a:avLst/>
               <a:pathLst>
-                <a:path w="7090630" h="3466372">
+                <a:path w="7090630" h="3465741">
                   <a:moveTo>
-                    <a:pt x="1676236" y="0"/>
+                    <a:pt x="1662733" y="0"/>
                   </a:moveTo>
                   <a:lnTo>
-                    <a:pt x="1718940" y="144598"/>
-                  </a:lnTo>
-                  <a:lnTo>
-                    <a:pt x="1790563" y="370698"/>
-                  </a:lnTo>
-                  <a:lnTo>
-                    <a:pt x="1862185" y="581488"/>
-                  </a:lnTo>
-                  <a:lnTo>
-                    <a:pt x="1933808" y="778005"/>
-                  </a:lnTo>
-                  <a:lnTo>
-                    <a:pt x="2005430" y="961215"/>
-                  </a:lnTo>
-                  <a:lnTo>
-                    <a:pt x="2077053" y="1132020"/>
-                  </a:lnTo>
-                  <a:lnTo>
-                    <a:pt x="2148675" y="1291260"/>
-                  </a:lnTo>
-                  <a:lnTo>
-                    <a:pt x="2220298" y="1439717"/>
-                  </a:lnTo>
-                  <a:lnTo>
-                    <a:pt x="2291920" y="1578122"/>
-                  </a:lnTo>
-                  <a:lnTo>
-                    <a:pt x="2363543" y="1707155"/>
-                  </a:lnTo>
-                  <a:lnTo>
-                    <a:pt x="2435165" y="1827451"/>
-                  </a:lnTo>
-                  <a:lnTo>
-                    <a:pt x="2506788" y="1939602"/>
-                  </a:lnTo>
-                  <a:lnTo>
-                    <a:pt x="2578410" y="2044158"/>
-                  </a:lnTo>
-                  <a:lnTo>
-                    <a:pt x="2650033" y="2141635"/>
-                  </a:lnTo>
-                  <a:lnTo>
-                    <a:pt x="2721655" y="2232512"/>
-                  </a:lnTo>
-                  <a:lnTo>
-                    <a:pt x="2793278" y="2317235"/>
-                  </a:lnTo>
-                  <a:lnTo>
-                    <a:pt x="2864901" y="2396222"/>
-                  </a:lnTo>
-                  <a:lnTo>
-                    <a:pt x="2936523" y="2469860"/>
-                  </a:lnTo>
-                  <a:lnTo>
-                    <a:pt x="3008146" y="2538512"/>
-                  </a:lnTo>
-                  <a:lnTo>
-                    <a:pt x="3079768" y="2602515"/>
-                  </a:lnTo>
-                  <a:lnTo>
-                    <a:pt x="3151391" y="2656270"/>
-                  </a:lnTo>
-                  <a:lnTo>
-                    <a:pt x="3223013" y="2670682"/>
-                  </a:lnTo>
-                  <a:lnTo>
-                    <a:pt x="3294636" y="2684843"/>
-                  </a:lnTo>
-                  <a:lnTo>
-                    <a:pt x="3366258" y="2698757"/>
-                  </a:lnTo>
-                  <a:lnTo>
-                    <a:pt x="3437881" y="2712428"/>
-                  </a:lnTo>
-                  <a:lnTo>
-                    <a:pt x="3509503" y="2725862"/>
-                  </a:lnTo>
-                  <a:lnTo>
-                    <a:pt x="3581126" y="2739061"/>
-                  </a:lnTo>
-                  <a:lnTo>
-                    <a:pt x="3652748" y="2752031"/>
-                  </a:lnTo>
-                  <a:lnTo>
-                    <a:pt x="3724371" y="2764775"/>
-                  </a:lnTo>
-                  <a:lnTo>
-                    <a:pt x="3795993" y="2777297"/>
-                  </a:lnTo>
-                  <a:lnTo>
-                    <a:pt x="3867616" y="2789601"/>
-                  </a:lnTo>
-                  <a:lnTo>
-                    <a:pt x="3939238" y="2801690"/>
-                  </a:lnTo>
-                  <a:lnTo>
-                    <a:pt x="4010861" y="2813569"/>
-                  </a:lnTo>
-                  <a:lnTo>
-                    <a:pt x="4082483" y="2825241"/>
-                  </a:lnTo>
-                  <a:lnTo>
-                    <a:pt x="4154106" y="2836710"/>
-                  </a:lnTo>
-                  <a:lnTo>
-                    <a:pt x="4225729" y="2847979"/>
-                  </a:lnTo>
-                  <a:lnTo>
-                    <a:pt x="4297351" y="2859052"/>
-                  </a:lnTo>
-                  <a:lnTo>
-                    <a:pt x="4368974" y="2869932"/>
-                  </a:lnTo>
-                  <a:lnTo>
-                    <a:pt x="4440596" y="2880622"/>
-                  </a:lnTo>
-                  <a:lnTo>
-                    <a:pt x="4512219" y="2891127"/>
-                  </a:lnTo>
-                  <a:lnTo>
-                    <a:pt x="4583841" y="2901448"/>
-                  </a:lnTo>
-                  <a:lnTo>
-                    <a:pt x="4655464" y="2911589"/>
-                  </a:lnTo>
-                  <a:lnTo>
-                    <a:pt x="4727086" y="2921554"/>
-                  </a:lnTo>
-                  <a:lnTo>
-                    <a:pt x="4798709" y="2931346"/>
-                  </a:lnTo>
-                  <a:lnTo>
-                    <a:pt x="4870331" y="2940967"/>
-                  </a:lnTo>
-                  <a:lnTo>
-                    <a:pt x="4941954" y="2950420"/>
-                  </a:lnTo>
-                  <a:lnTo>
-                    <a:pt x="5013576" y="2959708"/>
-                  </a:lnTo>
-                  <a:lnTo>
-                    <a:pt x="5085199" y="2968835"/>
-                  </a:lnTo>
-                  <a:lnTo>
-                    <a:pt x="5156821" y="2977803"/>
-                  </a:lnTo>
-                  <a:lnTo>
-                    <a:pt x="5228444" y="2986615"/>
-                  </a:lnTo>
-                  <a:lnTo>
-                    <a:pt x="5300066" y="2995273"/>
-                  </a:lnTo>
-                  <a:lnTo>
-                    <a:pt x="5371689" y="3003781"/>
-                  </a:lnTo>
-                  <a:lnTo>
-                    <a:pt x="5443311" y="3012140"/>
-                  </a:lnTo>
-                  <a:lnTo>
-                    <a:pt x="5514934" y="3020354"/>
-                  </a:lnTo>
-                  <a:lnTo>
-                    <a:pt x="5586557" y="3028424"/>
-                  </a:lnTo>
-                  <a:lnTo>
-                    <a:pt x="5658179" y="3036354"/>
-                  </a:lnTo>
-                  <a:lnTo>
-                    <a:pt x="5729802" y="3044146"/>
-                  </a:lnTo>
-                  <a:lnTo>
-                    <a:pt x="5801424" y="3051803"/>
-                  </a:lnTo>
-                  <a:lnTo>
-                    <a:pt x="5873047" y="3059325"/>
-                  </a:lnTo>
-                  <a:lnTo>
-                    <a:pt x="5944669" y="3066717"/>
-                  </a:lnTo>
-                  <a:lnTo>
-                    <a:pt x="6016292" y="3073980"/>
-                  </a:lnTo>
-                  <a:lnTo>
-                    <a:pt x="6087914" y="3081117"/>
-                  </a:lnTo>
-                  <a:lnTo>
-                    <a:pt x="6159537" y="3088129"/>
-                  </a:lnTo>
-                  <a:lnTo>
-                    <a:pt x="6231159" y="3095020"/>
-                  </a:lnTo>
-                  <a:lnTo>
-                    <a:pt x="6302782" y="3101790"/>
-                  </a:lnTo>
-                  <a:lnTo>
-                    <a:pt x="6374404" y="3108442"/>
-                  </a:lnTo>
-                  <a:lnTo>
-                    <a:pt x="6446027" y="3114979"/>
-                  </a:lnTo>
-                  <a:lnTo>
-                    <a:pt x="6517649" y="3121401"/>
-                  </a:lnTo>
-                  <a:lnTo>
-                    <a:pt x="6589272" y="3127712"/>
-                  </a:lnTo>
-                  <a:lnTo>
-                    <a:pt x="6660894" y="3133913"/>
-                  </a:lnTo>
-                  <a:lnTo>
-                    <a:pt x="6732517" y="3140006"/>
-                  </a:lnTo>
-                  <a:lnTo>
-                    <a:pt x="6804139" y="3145992"/>
-                  </a:lnTo>
-                  <a:lnTo>
-                    <a:pt x="6875762" y="3151875"/>
-                  </a:lnTo>
-                  <a:lnTo>
-                    <a:pt x="6947385" y="3157655"/>
-                  </a:lnTo>
-                  <a:lnTo>
-                    <a:pt x="7019007" y="3163334"/>
-                  </a:lnTo>
-                  <a:lnTo>
-                    <a:pt x="7090630" y="3168915"/>
-                  </a:lnTo>
-                  <a:lnTo>
-                    <a:pt x="7090630" y="3466372"/>
-                  </a:lnTo>
-                  <a:lnTo>
-                    <a:pt x="7019007" y="3465110"/>
-                  </a:lnTo>
-                  <a:lnTo>
-                    <a:pt x="6947385" y="3463757"/>
-                  </a:lnTo>
-                  <a:lnTo>
-                    <a:pt x="6875762" y="3462305"/>
-                  </a:lnTo>
-                  <a:lnTo>
-                    <a:pt x="6804139" y="3460748"/>
-                  </a:lnTo>
-                  <a:lnTo>
-                    <a:pt x="6732517" y="3459077"/>
-                  </a:lnTo>
-                  <a:lnTo>
-                    <a:pt x="6660894" y="3457286"/>
-                  </a:lnTo>
-                  <a:lnTo>
-                    <a:pt x="6589272" y="3455364"/>
-                  </a:lnTo>
-                  <a:lnTo>
-                    <a:pt x="6517649" y="3453303"/>
-                  </a:lnTo>
-                  <a:lnTo>
-                    <a:pt x="6446027" y="3451091"/>
-                  </a:lnTo>
-                  <a:lnTo>
-                    <a:pt x="6374404" y="3448720"/>
-                  </a:lnTo>
-                  <a:lnTo>
-                    <a:pt x="6302782" y="3446176"/>
-                  </a:lnTo>
-                  <a:lnTo>
-                    <a:pt x="6231159" y="3443447"/>
-                  </a:lnTo>
-                  <a:lnTo>
-                    <a:pt x="6159537" y="3440520"/>
-                  </a:lnTo>
-                  <a:lnTo>
-                    <a:pt x="6087914" y="3437380"/>
-                  </a:lnTo>
-                  <a:lnTo>
-                    <a:pt x="6016292" y="3434013"/>
-                  </a:lnTo>
-                  <a:lnTo>
-                    <a:pt x="5944669" y="3430401"/>
-                  </a:lnTo>
-                  <a:lnTo>
-                    <a:pt x="5873047" y="3426526"/>
-                  </a:lnTo>
-                  <a:lnTo>
-                    <a:pt x="5801424" y="3422370"/>
-                  </a:lnTo>
-                  <a:lnTo>
-                    <a:pt x="5729802" y="3417913"/>
-                  </a:lnTo>
-                  <a:lnTo>
-                    <a:pt x="5658179" y="3413131"/>
-                  </a:lnTo>
-                  <a:lnTo>
-                    <a:pt x="5586557" y="3408003"/>
-                  </a:lnTo>
-                  <a:lnTo>
-                    <a:pt x="5514934" y="3402501"/>
-                  </a:lnTo>
-                  <a:lnTo>
-                    <a:pt x="5443311" y="3396601"/>
-                  </a:lnTo>
-                  <a:lnTo>
-                    <a:pt x="5371689" y="3390271"/>
-                  </a:lnTo>
-                  <a:lnTo>
-                    <a:pt x="5300066" y="3383482"/>
-                  </a:lnTo>
-                  <a:lnTo>
-                    <a:pt x="5228444" y="3376200"/>
-                  </a:lnTo>
-                  <a:lnTo>
-                    <a:pt x="5156821" y="3368389"/>
-                  </a:lnTo>
-                  <a:lnTo>
-                    <a:pt x="5085199" y="3360010"/>
-                  </a:lnTo>
-                  <a:lnTo>
-                    <a:pt x="5013576" y="3351024"/>
-                  </a:lnTo>
-                  <a:lnTo>
-                    <a:pt x="4941954" y="3341384"/>
-                  </a:lnTo>
-                  <a:lnTo>
-                    <a:pt x="4870331" y="3331044"/>
-                  </a:lnTo>
-                  <a:lnTo>
-                    <a:pt x="4798709" y="3319954"/>
-                  </a:lnTo>
-                  <a:lnTo>
-                    <a:pt x="4727086" y="3308057"/>
-                  </a:lnTo>
-                  <a:lnTo>
-                    <a:pt x="4655464" y="3295297"/>
-                  </a:lnTo>
-                  <a:lnTo>
-                    <a:pt x="4583841" y="3281610"/>
-                  </a:lnTo>
-                  <a:lnTo>
-                    <a:pt x="4512219" y="3266929"/>
-                  </a:lnTo>
-                  <a:lnTo>
-                    <a:pt x="4440596" y="3251182"/>
-                  </a:lnTo>
-                  <a:lnTo>
-                    <a:pt x="4368974" y="3234291"/>
-                  </a:lnTo>
-                  <a:lnTo>
-                    <a:pt x="4297351" y="3216173"/>
-                  </a:lnTo>
-                  <a:lnTo>
-                    <a:pt x="4225729" y="3196739"/>
-                  </a:lnTo>
-                  <a:lnTo>
-                    <a:pt x="4154106" y="3175894"/>
-                  </a:lnTo>
-                  <a:lnTo>
-                    <a:pt x="4082483" y="3153534"/>
-                  </a:lnTo>
-                  <a:lnTo>
-                    <a:pt x="4010861" y="3129551"/>
-                  </a:lnTo>
-                  <a:lnTo>
-                    <a:pt x="3939238" y="3103826"/>
-                  </a:lnTo>
-                  <a:lnTo>
-                    <a:pt x="3867616" y="3076233"/>
-                  </a:lnTo>
-                  <a:lnTo>
-                    <a:pt x="3795993" y="3046635"/>
-                  </a:lnTo>
-                  <a:lnTo>
-                    <a:pt x="3724371" y="3014888"/>
-                  </a:lnTo>
-                  <a:lnTo>
-                    <a:pt x="3652748" y="2980835"/>
-                  </a:lnTo>
-                  <a:lnTo>
-                    <a:pt x="3581126" y="2944309"/>
-                  </a:lnTo>
-                  <a:lnTo>
-                    <a:pt x="3509503" y="2905130"/>
-                  </a:lnTo>
-                  <a:lnTo>
-                    <a:pt x="3437881" y="2863105"/>
-                  </a:lnTo>
-                  <a:lnTo>
-                    <a:pt x="3366258" y="2818028"/>
-                  </a:lnTo>
-                  <a:lnTo>
-                    <a:pt x="3294636" y="2769677"/>
-                  </a:lnTo>
-                  <a:lnTo>
-                    <a:pt x="3223013" y="2717814"/>
-                  </a:lnTo>
-                  <a:lnTo>
-                    <a:pt x="3151391" y="2662185"/>
-                  </a:lnTo>
-                  <a:lnTo>
-                    <a:pt x="3079768" y="2641603"/>
-                  </a:lnTo>
-                  <a:lnTo>
-                    <a:pt x="3008146" y="2626676"/>
-                  </a:lnTo>
-                  <a:lnTo>
-                    <a:pt x="2936523" y="2611484"/>
-                  </a:lnTo>
-                  <a:lnTo>
-                    <a:pt x="2864901" y="2596023"/>
-                  </a:lnTo>
-                  <a:lnTo>
-                    <a:pt x="2793278" y="2580288"/>
-                  </a:lnTo>
-                  <a:lnTo>
-                    <a:pt x="2721655" y="2564275"/>
-                  </a:lnTo>
-                  <a:lnTo>
-                    <a:pt x="2650033" y="2547977"/>
-                  </a:lnTo>
-                  <a:lnTo>
-                    <a:pt x="2578410" y="2531390"/>
-                  </a:lnTo>
-                  <a:lnTo>
-                    <a:pt x="2506788" y="2514510"/>
-                  </a:lnTo>
-                  <a:lnTo>
-                    <a:pt x="2435165" y="2497330"/>
-                  </a:lnTo>
-                  <a:lnTo>
-                    <a:pt x="2363543" y="2479845"/>
-                  </a:lnTo>
-                  <a:lnTo>
-                    <a:pt x="2291920" y="2462051"/>
-                  </a:lnTo>
-                  <a:lnTo>
-                    <a:pt x="2220298" y="2443941"/>
-                  </a:lnTo>
-                  <a:lnTo>
-                    <a:pt x="2148675" y="2425511"/>
-                  </a:lnTo>
-                  <a:lnTo>
-                    <a:pt x="2077053" y="2406753"/>
-                  </a:lnTo>
-                  <a:lnTo>
-                    <a:pt x="2005430" y="2387664"/>
-                  </a:lnTo>
-                  <a:lnTo>
-                    <a:pt x="1933808" y="2368235"/>
-                  </a:lnTo>
-                  <a:lnTo>
-                    <a:pt x="1862185" y="2348463"/>
-                  </a:lnTo>
-                  <a:lnTo>
-                    <a:pt x="1790563" y="2328340"/>
-                  </a:lnTo>
-                  <a:lnTo>
-                    <a:pt x="1718940" y="2307860"/>
-                  </a:lnTo>
-                  <a:lnTo>
-                    <a:pt x="1647318" y="2287017"/>
-                  </a:lnTo>
-                  <a:lnTo>
-                    <a:pt x="1575695" y="2265805"/>
-                  </a:lnTo>
-                  <a:lnTo>
-                    <a:pt x="1504073" y="2244217"/>
-                  </a:lnTo>
-                  <a:lnTo>
-                    <a:pt x="1432450" y="2222246"/>
-                  </a:lnTo>
-                  <a:lnTo>
-                    <a:pt x="1360827" y="2199886"/>
-                  </a:lnTo>
-                  <a:lnTo>
-                    <a:pt x="1289205" y="2177129"/>
-                  </a:lnTo>
-                  <a:lnTo>
-                    <a:pt x="1217582" y="2153970"/>
-                  </a:lnTo>
-                  <a:lnTo>
-                    <a:pt x="1145960" y="2130399"/>
-                  </a:lnTo>
-                  <a:lnTo>
-                    <a:pt x="1074337" y="2106411"/>
-                  </a:lnTo>
-                  <a:lnTo>
-                    <a:pt x="1002715" y="2081997"/>
-                  </a:lnTo>
-                  <a:lnTo>
-                    <a:pt x="931092" y="2057151"/>
-                  </a:lnTo>
-                  <a:lnTo>
-                    <a:pt x="859470" y="2031865"/>
-                  </a:lnTo>
-                  <a:lnTo>
-                    <a:pt x="787847" y="2006130"/>
-                  </a:lnTo>
-                  <a:lnTo>
-                    <a:pt x="716225" y="1979939"/>
-                  </a:lnTo>
-                  <a:lnTo>
-                    <a:pt x="644602" y="1953284"/>
-                  </a:lnTo>
-                  <a:lnTo>
-                    <a:pt x="572980" y="1926156"/>
-                  </a:lnTo>
-                  <a:lnTo>
-                    <a:pt x="501357" y="1898548"/>
-                  </a:lnTo>
-                  <a:lnTo>
-                    <a:pt x="429735" y="1870450"/>
-                  </a:lnTo>
-                  <a:lnTo>
-                    <a:pt x="358112" y="1841854"/>
-                  </a:lnTo>
-                  <a:lnTo>
-                    <a:pt x="286490" y="1812751"/>
-                  </a:lnTo>
-                  <a:lnTo>
-                    <a:pt x="214867" y="1783133"/>
-                  </a:lnTo>
-                  <a:lnTo>
-                    <a:pt x="143245" y="1752989"/>
-                  </a:lnTo>
-                  <a:lnTo>
-                    <a:pt x="71622" y="1722311"/>
-                  </a:lnTo>
-                  <a:lnTo>
-                    <a:pt x="0" y="1691090"/>
+                    <a:pt x="1718940" y="186169"/>
+                  </a:lnTo>
+                  <a:lnTo>
+                    <a:pt x="1790563" y="407476"/>
+                  </a:lnTo>
+                  <a:lnTo>
+                    <a:pt x="1862185" y="613931"/>
+                  </a:lnTo>
+                  <a:lnTo>
+                    <a:pt x="1933808" y="806530"/>
+                  </a:lnTo>
+                  <a:lnTo>
+                    <a:pt x="2005430" y="986204"/>
+                  </a:lnTo>
+                  <a:lnTo>
+                    <a:pt x="2077053" y="1153819"/>
+                  </a:lnTo>
+                  <a:lnTo>
+                    <a:pt x="2148675" y="1310185"/>
+                  </a:lnTo>
+                  <a:lnTo>
+                    <a:pt x="2220298" y="1456057"/>
+                  </a:lnTo>
+                  <a:lnTo>
+                    <a:pt x="2291920" y="1592140"/>
+                  </a:lnTo>
+                  <a:lnTo>
+                    <a:pt x="2363543" y="1719089"/>
+                  </a:lnTo>
+                  <a:lnTo>
+                    <a:pt x="2435165" y="1837519"/>
+                  </a:lnTo>
+                  <a:lnTo>
+                    <a:pt x="2506788" y="1948001"/>
+                  </a:lnTo>
+                  <a:lnTo>
+                    <a:pt x="2578410" y="2051068"/>
+                  </a:lnTo>
+                  <a:lnTo>
+                    <a:pt x="2650033" y="2147218"/>
+                  </a:lnTo>
+                  <a:lnTo>
+                    <a:pt x="2721655" y="2236915"/>
+                  </a:lnTo>
+                  <a:lnTo>
+                    <a:pt x="2793278" y="2320592"/>
+                  </a:lnTo>
+                  <a:lnTo>
+                    <a:pt x="2864901" y="2398654"/>
+                  </a:lnTo>
+                  <a:lnTo>
+                    <a:pt x="2936523" y="2471477"/>
+                  </a:lnTo>
+                  <a:lnTo>
+                    <a:pt x="3008146" y="2539412"/>
+                  </a:lnTo>
+                  <a:lnTo>
+                    <a:pt x="3079768" y="2602788"/>
+                  </a:lnTo>
+                  <a:lnTo>
+                    <a:pt x="3151391" y="2656192"/>
+                  </a:lnTo>
+                  <a:lnTo>
+                    <a:pt x="3223013" y="2670408"/>
+                  </a:lnTo>
+                  <a:lnTo>
+                    <a:pt x="3294636" y="2684380"/>
+                  </a:lnTo>
+                  <a:lnTo>
+                    <a:pt x="3366258" y="2698112"/>
+                  </a:lnTo>
+                  <a:lnTo>
+                    <a:pt x="3437881" y="2711608"/>
+                  </a:lnTo>
+                  <a:lnTo>
+                    <a:pt x="3509503" y="2724872"/>
+                  </a:lnTo>
+                  <a:lnTo>
+                    <a:pt x="3581126" y="2737908"/>
+                  </a:lnTo>
+                  <a:lnTo>
+                    <a:pt x="3652748" y="2750720"/>
+                  </a:lnTo>
+                  <a:lnTo>
+                    <a:pt x="3724371" y="2763313"/>
+                  </a:lnTo>
+                  <a:lnTo>
+                    <a:pt x="3795993" y="2775688"/>
+                  </a:lnTo>
+                  <a:lnTo>
+                    <a:pt x="3867616" y="2787852"/>
+                  </a:lnTo>
+                  <a:lnTo>
+                    <a:pt x="3939238" y="2799806"/>
+                  </a:lnTo>
+                  <a:lnTo>
+                    <a:pt x="4010861" y="2811555"/>
+                  </a:lnTo>
+                  <a:lnTo>
+                    <a:pt x="4082483" y="2823102"/>
+                  </a:lnTo>
+                  <a:lnTo>
+                    <a:pt x="4154106" y="2834451"/>
+                  </a:lnTo>
+                  <a:lnTo>
+                    <a:pt x="4225729" y="2845605"/>
+                  </a:lnTo>
+                  <a:lnTo>
+                    <a:pt x="4297351" y="2856567"/>
+                  </a:lnTo>
+                  <a:lnTo>
+                    <a:pt x="4368974" y="2867341"/>
+                  </a:lnTo>
+                  <a:lnTo>
+                    <a:pt x="4440596" y="2877930"/>
+                  </a:lnTo>
+                  <a:lnTo>
+                    <a:pt x="4512219" y="2888337"/>
+                  </a:lnTo>
+                  <a:lnTo>
+                    <a:pt x="4583841" y="2898565"/>
+                  </a:lnTo>
+                  <a:lnTo>
+                    <a:pt x="4655464" y="2908617"/>
+                  </a:lnTo>
+                  <a:lnTo>
+                    <a:pt x="4727086" y="2918497"/>
+                  </a:lnTo>
+                  <a:lnTo>
+                    <a:pt x="4798709" y="2928207"/>
+                  </a:lnTo>
+                  <a:lnTo>
+                    <a:pt x="4870331" y="2937750"/>
+                  </a:lnTo>
+                  <a:lnTo>
+                    <a:pt x="4941954" y="2947130"/>
+                  </a:lnTo>
+                  <a:lnTo>
+                    <a:pt x="5013576" y="2956348"/>
+                  </a:lnTo>
+                  <a:lnTo>
+                    <a:pt x="5085199" y="2965408"/>
+                  </a:lnTo>
+                  <a:lnTo>
+                    <a:pt x="5156821" y="2974312"/>
+                  </a:lnTo>
+                  <a:lnTo>
+                    <a:pt x="5228444" y="2983063"/>
+                  </a:lnTo>
+                  <a:lnTo>
+                    <a:pt x="5300066" y="2991664"/>
+                  </a:lnTo>
+                  <a:lnTo>
+                    <a:pt x="5371689" y="3000117"/>
+                  </a:lnTo>
+                  <a:lnTo>
+                    <a:pt x="5443311" y="3008425"/>
+                  </a:lnTo>
+                  <a:lnTo>
+                    <a:pt x="5514934" y="3016590"/>
+                  </a:lnTo>
+                  <a:lnTo>
+                    <a:pt x="5586557" y="3024615"/>
+                  </a:lnTo>
+                  <a:lnTo>
+                    <a:pt x="5658179" y="3032503"/>
+                  </a:lnTo>
+                  <a:lnTo>
+                    <a:pt x="5729802" y="3040254"/>
+                  </a:lnTo>
+                  <a:lnTo>
+                    <a:pt x="5801424" y="3047873"/>
+                  </a:lnTo>
+                  <a:lnTo>
+                    <a:pt x="5873047" y="3055360"/>
+                  </a:lnTo>
+                  <a:lnTo>
+                    <a:pt x="5944669" y="3062719"/>
+                  </a:lnTo>
+                  <a:lnTo>
+                    <a:pt x="6016292" y="3069952"/>
+                  </a:lnTo>
+                  <a:lnTo>
+                    <a:pt x="6087914" y="3077060"/>
+                  </a:lnTo>
+                  <a:lnTo>
+                    <a:pt x="6159537" y="3084046"/>
+                  </a:lnTo>
+                  <a:lnTo>
+                    <a:pt x="6231159" y="3090912"/>
+                  </a:lnTo>
+                  <a:lnTo>
+                    <a:pt x="6302782" y="3097661"/>
+                  </a:lnTo>
+                  <a:lnTo>
+                    <a:pt x="6374404" y="3104293"/>
+                  </a:lnTo>
+                  <a:lnTo>
+                    <a:pt x="6446027" y="3110811"/>
+                  </a:lnTo>
+                  <a:lnTo>
+                    <a:pt x="6517649" y="3117218"/>
+                  </a:lnTo>
+                  <a:lnTo>
+                    <a:pt x="6589272" y="3123514"/>
+                  </a:lnTo>
+                  <a:lnTo>
+                    <a:pt x="6660894" y="3129702"/>
+                  </a:lnTo>
+                  <a:lnTo>
+                    <a:pt x="6732517" y="3135784"/>
+                  </a:lnTo>
+                  <a:lnTo>
+                    <a:pt x="6804139" y="3141762"/>
+                  </a:lnTo>
+                  <a:lnTo>
+                    <a:pt x="6875762" y="3147636"/>
+                  </a:lnTo>
+                  <a:lnTo>
+                    <a:pt x="6947385" y="3153410"/>
+                  </a:lnTo>
+                  <a:lnTo>
+                    <a:pt x="7019007" y="3159085"/>
+                  </a:lnTo>
+                  <a:lnTo>
+                    <a:pt x="7090630" y="3164662"/>
+                  </a:lnTo>
+                  <a:lnTo>
+                    <a:pt x="7090630" y="3465741"/>
+                  </a:lnTo>
+                  <a:lnTo>
+                    <a:pt x="7019007" y="3464446"/>
+                  </a:lnTo>
+                  <a:lnTo>
+                    <a:pt x="6947385" y="3463057"/>
+                  </a:lnTo>
+                  <a:lnTo>
+                    <a:pt x="6875762" y="3461569"/>
+                  </a:lnTo>
+                  <a:lnTo>
+                    <a:pt x="6804139" y="3459973"/>
+                  </a:lnTo>
+                  <a:lnTo>
+                    <a:pt x="6732517" y="3458263"/>
+                  </a:lnTo>
+                  <a:lnTo>
+                    <a:pt x="6660894" y="3456430"/>
+                  </a:lnTo>
+                  <a:lnTo>
+                    <a:pt x="6589272" y="3454464"/>
+                  </a:lnTo>
+                  <a:lnTo>
+                    <a:pt x="6517649" y="3452358"/>
+                  </a:lnTo>
+                  <a:lnTo>
+                    <a:pt x="6446027" y="3450100"/>
+                  </a:lnTo>
+                  <a:lnTo>
+                    <a:pt x="6374404" y="3447679"/>
+                  </a:lnTo>
+                  <a:lnTo>
+                    <a:pt x="6302782" y="3445085"/>
+                  </a:lnTo>
+                  <a:lnTo>
+                    <a:pt x="6231159" y="3442303"/>
+                  </a:lnTo>
+                  <a:lnTo>
+                    <a:pt x="6159537" y="3439322"/>
+                  </a:lnTo>
+                  <a:lnTo>
+                    <a:pt x="6087914" y="3436126"/>
+                  </a:lnTo>
+                  <a:lnTo>
+                    <a:pt x="6016292" y="3432700"/>
+                  </a:lnTo>
+                  <a:lnTo>
+                    <a:pt x="5944669" y="3429028"/>
+                  </a:lnTo>
+                  <a:lnTo>
+                    <a:pt x="5873047" y="3425091"/>
+                  </a:lnTo>
+                  <a:lnTo>
+                    <a:pt x="5801424" y="3420872"/>
+                  </a:lnTo>
+                  <a:lnTo>
+                    <a:pt x="5729802" y="3416349"/>
+                  </a:lnTo>
+                  <a:lnTo>
+                    <a:pt x="5658179" y="3411500"/>
+                  </a:lnTo>
+                  <a:lnTo>
+                    <a:pt x="5586557" y="3406303"/>
+                  </a:lnTo>
+                  <a:lnTo>
+                    <a:pt x="5514934" y="3400731"/>
+                  </a:lnTo>
+                  <a:lnTo>
+                    <a:pt x="5443311" y="3394759"/>
+                  </a:lnTo>
+                  <a:lnTo>
+                    <a:pt x="5371689" y="3388357"/>
+                  </a:lnTo>
+                  <a:lnTo>
+                    <a:pt x="5300066" y="3381495"/>
+                  </a:lnTo>
+                  <a:lnTo>
+                    <a:pt x="5228444" y="3374139"/>
+                  </a:lnTo>
+                  <a:lnTo>
+                    <a:pt x="5156821" y="3366254"/>
+                  </a:lnTo>
+                  <a:lnTo>
+                    <a:pt x="5085199" y="3357801"/>
+                  </a:lnTo>
+                  <a:lnTo>
+                    <a:pt x="5013576" y="3348741"/>
+                  </a:lnTo>
+                  <a:lnTo>
+                    <a:pt x="4941954" y="3339029"/>
+                  </a:lnTo>
+                  <a:lnTo>
+                    <a:pt x="4870331" y="3328618"/>
+                  </a:lnTo>
+                  <a:lnTo>
+                    <a:pt x="4798709" y="3317458"/>
+                  </a:lnTo>
+                  <a:lnTo>
+                    <a:pt x="4727086" y="3305495"/>
+                  </a:lnTo>
+                  <a:lnTo>
+                    <a:pt x="4655464" y="3292671"/>
+                  </a:lnTo>
+                  <a:lnTo>
+                    <a:pt x="4583841" y="3278925"/>
+                  </a:lnTo>
+                  <a:lnTo>
+                    <a:pt x="4512219" y="3264191"/>
+                  </a:lnTo>
+                  <a:lnTo>
+                    <a:pt x="4440596" y="3248396"/>
+                  </a:lnTo>
+                  <a:lnTo>
+                    <a:pt x="4368974" y="3231465"/>
+                  </a:lnTo>
+                  <a:lnTo>
+                    <a:pt x="4297351" y="3213315"/>
+                  </a:lnTo>
+                  <a:lnTo>
+                    <a:pt x="4225729" y="3193861"/>
+                  </a:lnTo>
+                  <a:lnTo>
+                    <a:pt x="4154106" y="3173006"/>
+                  </a:lnTo>
+                  <a:lnTo>
+                    <a:pt x="4082483" y="3150652"/>
+                  </a:lnTo>
+                  <a:lnTo>
+                    <a:pt x="4010861" y="3126689"/>
+                  </a:lnTo>
+                  <a:lnTo>
+                    <a:pt x="3939238" y="3101002"/>
+                  </a:lnTo>
+                  <a:lnTo>
+                    <a:pt x="3867616" y="3073467"/>
+                  </a:lnTo>
+                  <a:lnTo>
+                    <a:pt x="3795993" y="3043952"/>
+                  </a:lnTo>
+                  <a:lnTo>
+                    <a:pt x="3724371" y="3012313"/>
+                  </a:lnTo>
+                  <a:lnTo>
+                    <a:pt x="3652748" y="2978398"/>
+                  </a:lnTo>
+                  <a:lnTo>
+                    <a:pt x="3581126" y="2942043"/>
+                  </a:lnTo>
+                  <a:lnTo>
+                    <a:pt x="3509503" y="2903073"/>
+                  </a:lnTo>
+                  <a:lnTo>
+                    <a:pt x="3437881" y="2861299"/>
+                  </a:lnTo>
+                  <a:lnTo>
+                    <a:pt x="3366258" y="2816520"/>
+                  </a:lnTo>
+                  <a:lnTo>
+                    <a:pt x="3294636" y="2768520"/>
+                  </a:lnTo>
+                  <a:lnTo>
+                    <a:pt x="3223013" y="2717066"/>
+                  </a:lnTo>
+                  <a:lnTo>
+                    <a:pt x="3151391" y="2661911"/>
+                  </a:lnTo>
+                  <a:lnTo>
+                    <a:pt x="3079768" y="2641728"/>
+                  </a:lnTo>
+                  <a:lnTo>
+                    <a:pt x="3008146" y="2627010"/>
+                  </a:lnTo>
+                  <a:lnTo>
+                    <a:pt x="2936523" y="2612036"/>
+                  </a:lnTo>
+                  <a:lnTo>
+                    <a:pt x="2864901" y="2596800"/>
+                  </a:lnTo>
+                  <a:lnTo>
+                    <a:pt x="2793278" y="2581297"/>
+                  </a:lnTo>
+                  <a:lnTo>
+                    <a:pt x="2721655" y="2565523"/>
+                  </a:lnTo>
+                  <a:lnTo>
+                    <a:pt x="2650033" y="2549474"/>
+                  </a:lnTo>
+                  <a:lnTo>
+                    <a:pt x="2578410" y="2533144"/>
+                  </a:lnTo>
+                  <a:lnTo>
+                    <a:pt x="2506788" y="2516529"/>
+                  </a:lnTo>
+                  <a:lnTo>
+                    <a:pt x="2435165" y="2499624"/>
+                  </a:lnTo>
+                  <a:lnTo>
+                    <a:pt x="2363543" y="2482422"/>
+                  </a:lnTo>
+                  <a:lnTo>
+                    <a:pt x="2291920" y="2464921"/>
+                  </a:lnTo>
+                  <a:lnTo>
+                    <a:pt x="2220298" y="2447113"/>
+                  </a:lnTo>
+                  <a:lnTo>
+                    <a:pt x="2148675" y="2428994"/>
+                  </a:lnTo>
+                  <a:lnTo>
+                    <a:pt x="2077053" y="2410558"/>
+                  </a:lnTo>
+                  <a:lnTo>
+                    <a:pt x="2005430" y="2391801"/>
+                  </a:lnTo>
+                  <a:lnTo>
+                    <a:pt x="1933808" y="2372715"/>
+                  </a:lnTo>
+                  <a:lnTo>
+                    <a:pt x="1862185" y="2353296"/>
+                  </a:lnTo>
+                  <a:lnTo>
+                    <a:pt x="1790563" y="2333537"/>
+                  </a:lnTo>
+                  <a:lnTo>
+                    <a:pt x="1718940" y="2313433"/>
+                  </a:lnTo>
+                  <a:lnTo>
+                    <a:pt x="1647318" y="2292977"/>
+                  </a:lnTo>
+                  <a:lnTo>
+                    <a:pt x="1575695" y="2272164"/>
+                  </a:lnTo>
+                  <a:lnTo>
+                    <a:pt x="1504073" y="2250988"/>
+                  </a:lnTo>
+                  <a:lnTo>
+                    <a:pt x="1432450" y="2229441"/>
+                  </a:lnTo>
+                  <a:lnTo>
+                    <a:pt x="1360827" y="2207517"/>
+                  </a:lnTo>
+                  <a:lnTo>
+                    <a:pt x="1289205" y="2185211"/>
+                  </a:lnTo>
+                  <a:lnTo>
+                    <a:pt x="1217582" y="2162514"/>
+                  </a:lnTo>
+                  <a:lnTo>
+                    <a:pt x="1145960" y="2139421"/>
+                  </a:lnTo>
+                  <a:lnTo>
+                    <a:pt x="1074337" y="2115924"/>
+                  </a:lnTo>
+                  <a:lnTo>
+                    <a:pt x="1002715" y="2092016"/>
+                  </a:lnTo>
+                  <a:lnTo>
+                    <a:pt x="931092" y="2067691"/>
+                  </a:lnTo>
+                  <a:lnTo>
+                    <a:pt x="859470" y="2042940"/>
+                  </a:lnTo>
+                  <a:lnTo>
+                    <a:pt x="787847" y="2017757"/>
+                  </a:lnTo>
+                  <a:lnTo>
+                    <a:pt x="716225" y="1992133"/>
+                  </a:lnTo>
+                  <a:lnTo>
+                    <a:pt x="644602" y="1966062"/>
+                  </a:lnTo>
+                  <a:lnTo>
+                    <a:pt x="572980" y="1939535"/>
+                  </a:lnTo>
+                  <a:lnTo>
+                    <a:pt x="501357" y="1912544"/>
+                  </a:lnTo>
+                  <a:lnTo>
+                    <a:pt x="429735" y="1885082"/>
+                  </a:lnTo>
+                  <a:lnTo>
+                    <a:pt x="358112" y="1857139"/>
+                  </a:lnTo>
+                  <a:lnTo>
+                    <a:pt x="286490" y="1828708"/>
+                  </a:lnTo>
+                  <a:lnTo>
+                    <a:pt x="214867" y="1799781"/>
+                  </a:lnTo>
+                  <a:lnTo>
+                    <a:pt x="143245" y="1770347"/>
+                  </a:lnTo>
+                  <a:lnTo>
+                    <a:pt x="71622" y="1740399"/>
+                  </a:lnTo>
+                  <a:lnTo>
+                    <a:pt x="0" y="1709928"/>
                   </a:lnTo>
                   <a:close/>
                 </a:path>
@@ -3951,243 +3951,243 @@
           </p:nvSpPr>
           <p:spPr>
             <a:xfrm>
-              <a:off x="2848286" y="2073503"/>
-              <a:ext cx="5414393" cy="3168915"/>
+              <a:off x="2834782" y="2073503"/>
+              <a:ext cx="5427896" cy="3164662"/>
             </a:xfrm>
             <a:custGeom>
               <a:avLst/>
               <a:pathLst>
-                <a:path w="5414393" h="3168915">
+                <a:path w="5427896" h="3164662">
                   <a:moveTo>
                     <a:pt x="0" y="0"/>
                   </a:moveTo>
                   <a:lnTo>
-                    <a:pt x="42703" y="144598"/>
-                  </a:lnTo>
-                  <a:lnTo>
-                    <a:pt x="114326" y="370698"/>
-                  </a:lnTo>
-                  <a:lnTo>
-                    <a:pt x="185948" y="581488"/>
-                  </a:lnTo>
-                  <a:lnTo>
-                    <a:pt x="257571" y="778005"/>
-                  </a:lnTo>
-                  <a:lnTo>
-                    <a:pt x="329193" y="961215"/>
-                  </a:lnTo>
-                  <a:lnTo>
-                    <a:pt x="400816" y="1132020"/>
-                  </a:lnTo>
-                  <a:lnTo>
-                    <a:pt x="472438" y="1291260"/>
-                  </a:lnTo>
-                  <a:lnTo>
-                    <a:pt x="544061" y="1439717"/>
-                  </a:lnTo>
-                  <a:lnTo>
-                    <a:pt x="615683" y="1578122"/>
-                  </a:lnTo>
-                  <a:lnTo>
-                    <a:pt x="687306" y="1707155"/>
-                  </a:lnTo>
-                  <a:lnTo>
-                    <a:pt x="758928" y="1827451"/>
-                  </a:lnTo>
-                  <a:lnTo>
-                    <a:pt x="830551" y="1939602"/>
-                  </a:lnTo>
-                  <a:lnTo>
-                    <a:pt x="902173" y="2044158"/>
-                  </a:lnTo>
-                  <a:lnTo>
-                    <a:pt x="973796" y="2141635"/>
-                  </a:lnTo>
-                  <a:lnTo>
-                    <a:pt x="1045419" y="2232512"/>
-                  </a:lnTo>
-                  <a:lnTo>
-                    <a:pt x="1117041" y="2317235"/>
-                  </a:lnTo>
-                  <a:lnTo>
-                    <a:pt x="1188664" y="2396222"/>
-                  </a:lnTo>
-                  <a:lnTo>
-                    <a:pt x="1260286" y="2469860"/>
-                  </a:lnTo>
-                  <a:lnTo>
-                    <a:pt x="1331909" y="2538512"/>
-                  </a:lnTo>
-                  <a:lnTo>
-                    <a:pt x="1403531" y="2602515"/>
-                  </a:lnTo>
-                  <a:lnTo>
-                    <a:pt x="1475154" y="2656270"/>
-                  </a:lnTo>
-                  <a:lnTo>
-                    <a:pt x="1546776" y="2670682"/>
-                  </a:lnTo>
-                  <a:lnTo>
-                    <a:pt x="1618399" y="2684843"/>
-                  </a:lnTo>
-                  <a:lnTo>
-                    <a:pt x="1690021" y="2698757"/>
-                  </a:lnTo>
-                  <a:lnTo>
-                    <a:pt x="1761644" y="2712428"/>
-                  </a:lnTo>
-                  <a:lnTo>
-                    <a:pt x="1833266" y="2725862"/>
-                  </a:lnTo>
-                  <a:lnTo>
-                    <a:pt x="1904889" y="2739061"/>
-                  </a:lnTo>
-                  <a:lnTo>
-                    <a:pt x="1976511" y="2752031"/>
-                  </a:lnTo>
-                  <a:lnTo>
-                    <a:pt x="2048134" y="2764775"/>
-                  </a:lnTo>
-                  <a:lnTo>
-                    <a:pt x="2119756" y="2777297"/>
-                  </a:lnTo>
-                  <a:lnTo>
-                    <a:pt x="2191379" y="2789601"/>
-                  </a:lnTo>
-                  <a:lnTo>
-                    <a:pt x="2263001" y="2801690"/>
-                  </a:lnTo>
-                  <a:lnTo>
-                    <a:pt x="2334624" y="2813569"/>
-                  </a:lnTo>
-                  <a:lnTo>
-                    <a:pt x="2406247" y="2825241"/>
-                  </a:lnTo>
-                  <a:lnTo>
-                    <a:pt x="2477869" y="2836710"/>
-                  </a:lnTo>
-                  <a:lnTo>
-                    <a:pt x="2549492" y="2847979"/>
-                  </a:lnTo>
-                  <a:lnTo>
-                    <a:pt x="2621114" y="2859052"/>
-                  </a:lnTo>
-                  <a:lnTo>
-                    <a:pt x="2692737" y="2869932"/>
-                  </a:lnTo>
-                  <a:lnTo>
-                    <a:pt x="2764359" y="2880622"/>
-                  </a:lnTo>
-                  <a:lnTo>
-                    <a:pt x="2835982" y="2891127"/>
-                  </a:lnTo>
-                  <a:lnTo>
-                    <a:pt x="2907604" y="2901448"/>
-                  </a:lnTo>
-                  <a:lnTo>
-                    <a:pt x="2979227" y="2911589"/>
-                  </a:lnTo>
-                  <a:lnTo>
-                    <a:pt x="3050849" y="2921554"/>
-                  </a:lnTo>
-                  <a:lnTo>
-                    <a:pt x="3122472" y="2931346"/>
-                  </a:lnTo>
-                  <a:lnTo>
-                    <a:pt x="3194094" y="2940967"/>
-                  </a:lnTo>
-                  <a:lnTo>
-                    <a:pt x="3265717" y="2950420"/>
-                  </a:lnTo>
-                  <a:lnTo>
-                    <a:pt x="3337339" y="2959708"/>
-                  </a:lnTo>
-                  <a:lnTo>
-                    <a:pt x="3408962" y="2968835"/>
-                  </a:lnTo>
-                  <a:lnTo>
-                    <a:pt x="3480584" y="2977803"/>
-                  </a:lnTo>
-                  <a:lnTo>
-                    <a:pt x="3552207" y="2986615"/>
-                  </a:lnTo>
-                  <a:lnTo>
-                    <a:pt x="3623829" y="2995273"/>
-                  </a:lnTo>
-                  <a:lnTo>
-                    <a:pt x="3695452" y="3003781"/>
-                  </a:lnTo>
-                  <a:lnTo>
-                    <a:pt x="3767075" y="3012140"/>
-                  </a:lnTo>
-                  <a:lnTo>
-                    <a:pt x="3838697" y="3020354"/>
-                  </a:lnTo>
-                  <a:lnTo>
-                    <a:pt x="3910320" y="3028424"/>
-                  </a:lnTo>
-                  <a:lnTo>
-                    <a:pt x="3981942" y="3036354"/>
-                  </a:lnTo>
-                  <a:lnTo>
-                    <a:pt x="4053565" y="3044146"/>
-                  </a:lnTo>
-                  <a:lnTo>
-                    <a:pt x="4125187" y="3051803"/>
-                  </a:lnTo>
-                  <a:lnTo>
-                    <a:pt x="4196810" y="3059325"/>
-                  </a:lnTo>
-                  <a:lnTo>
-                    <a:pt x="4268432" y="3066717"/>
-                  </a:lnTo>
-                  <a:lnTo>
-                    <a:pt x="4340055" y="3073980"/>
-                  </a:lnTo>
-                  <a:lnTo>
-                    <a:pt x="4411677" y="3081117"/>
-                  </a:lnTo>
-                  <a:lnTo>
-                    <a:pt x="4483300" y="3088129"/>
-                  </a:lnTo>
-                  <a:lnTo>
-                    <a:pt x="4554922" y="3095020"/>
-                  </a:lnTo>
-                  <a:lnTo>
-                    <a:pt x="4626545" y="3101790"/>
-                  </a:lnTo>
-                  <a:lnTo>
-                    <a:pt x="4698167" y="3108442"/>
-                  </a:lnTo>
-                  <a:lnTo>
-                    <a:pt x="4769790" y="3114979"/>
-                  </a:lnTo>
-                  <a:lnTo>
-                    <a:pt x="4841412" y="3121401"/>
-                  </a:lnTo>
-                  <a:lnTo>
-                    <a:pt x="4913035" y="3127712"/>
-                  </a:lnTo>
-                  <a:lnTo>
-                    <a:pt x="4984657" y="3133913"/>
-                  </a:lnTo>
-                  <a:lnTo>
-                    <a:pt x="5056280" y="3140006"/>
-                  </a:lnTo>
-                  <a:lnTo>
-                    <a:pt x="5127903" y="3145992"/>
-                  </a:lnTo>
-                  <a:lnTo>
-                    <a:pt x="5199525" y="3151875"/>
-                  </a:lnTo>
-                  <a:lnTo>
-                    <a:pt x="5271148" y="3157655"/>
-                  </a:lnTo>
-                  <a:lnTo>
-                    <a:pt x="5342770" y="3163334"/>
-                  </a:lnTo>
-                  <a:lnTo>
-                    <a:pt x="5414393" y="3168915"/>
+                    <a:pt x="56207" y="186169"/>
+                  </a:lnTo>
+                  <a:lnTo>
+                    <a:pt x="127829" y="407476"/>
+                  </a:lnTo>
+                  <a:lnTo>
+                    <a:pt x="199452" y="613931"/>
+                  </a:lnTo>
+                  <a:lnTo>
+                    <a:pt x="271074" y="806530"/>
+                  </a:lnTo>
+                  <a:lnTo>
+                    <a:pt x="342697" y="986204"/>
+                  </a:lnTo>
+                  <a:lnTo>
+                    <a:pt x="414319" y="1153819"/>
+                  </a:lnTo>
+                  <a:lnTo>
+                    <a:pt x="485942" y="1310185"/>
+                  </a:lnTo>
+                  <a:lnTo>
+                    <a:pt x="557564" y="1456057"/>
+                  </a:lnTo>
+                  <a:lnTo>
+                    <a:pt x="629187" y="1592140"/>
+                  </a:lnTo>
+                  <a:lnTo>
+                    <a:pt x="700810" y="1719089"/>
+                  </a:lnTo>
+                  <a:lnTo>
+                    <a:pt x="772432" y="1837519"/>
+                  </a:lnTo>
+                  <a:lnTo>
+                    <a:pt x="844055" y="1948001"/>
+                  </a:lnTo>
+                  <a:lnTo>
+                    <a:pt x="915677" y="2051068"/>
+                  </a:lnTo>
+                  <a:lnTo>
+                    <a:pt x="987300" y="2147218"/>
+                  </a:lnTo>
+                  <a:lnTo>
+                    <a:pt x="1058922" y="2236915"/>
+                  </a:lnTo>
+                  <a:lnTo>
+                    <a:pt x="1130545" y="2320592"/>
+                  </a:lnTo>
+                  <a:lnTo>
+                    <a:pt x="1202167" y="2398654"/>
+                  </a:lnTo>
+                  <a:lnTo>
+                    <a:pt x="1273790" y="2471477"/>
+                  </a:lnTo>
+                  <a:lnTo>
+                    <a:pt x="1345412" y="2539412"/>
+                  </a:lnTo>
+                  <a:lnTo>
+                    <a:pt x="1417035" y="2602788"/>
+                  </a:lnTo>
+                  <a:lnTo>
+                    <a:pt x="1488657" y="2656192"/>
+                  </a:lnTo>
+                  <a:lnTo>
+                    <a:pt x="1560280" y="2670408"/>
+                  </a:lnTo>
+                  <a:lnTo>
+                    <a:pt x="1631902" y="2684380"/>
+                  </a:lnTo>
+                  <a:lnTo>
+                    <a:pt x="1703525" y="2698112"/>
+                  </a:lnTo>
+                  <a:lnTo>
+                    <a:pt x="1775147" y="2711608"/>
+                  </a:lnTo>
+                  <a:lnTo>
+                    <a:pt x="1846770" y="2724872"/>
+                  </a:lnTo>
+                  <a:lnTo>
+                    <a:pt x="1918392" y="2737908"/>
+                  </a:lnTo>
+                  <a:lnTo>
+                    <a:pt x="1990015" y="2750720"/>
+                  </a:lnTo>
+                  <a:lnTo>
+                    <a:pt x="2061638" y="2763313"/>
+                  </a:lnTo>
+                  <a:lnTo>
+                    <a:pt x="2133260" y="2775688"/>
+                  </a:lnTo>
+                  <a:lnTo>
+                    <a:pt x="2204883" y="2787852"/>
+                  </a:lnTo>
+                  <a:lnTo>
+                    <a:pt x="2276505" y="2799806"/>
+                  </a:lnTo>
+                  <a:lnTo>
+                    <a:pt x="2348128" y="2811555"/>
+                  </a:lnTo>
+                  <a:lnTo>
+                    <a:pt x="2419750" y="2823102"/>
+                  </a:lnTo>
+                  <a:lnTo>
+                    <a:pt x="2491373" y="2834451"/>
+                  </a:lnTo>
+                  <a:lnTo>
+                    <a:pt x="2562995" y="2845605"/>
+                  </a:lnTo>
+                  <a:lnTo>
+                    <a:pt x="2634618" y="2856567"/>
+                  </a:lnTo>
+                  <a:lnTo>
+                    <a:pt x="2706240" y="2867341"/>
+                  </a:lnTo>
+                  <a:lnTo>
+                    <a:pt x="2777863" y="2877930"/>
+                  </a:lnTo>
+                  <a:lnTo>
+                    <a:pt x="2849485" y="2888337"/>
+                  </a:lnTo>
+                  <a:lnTo>
+                    <a:pt x="2921108" y="2898565"/>
+                  </a:lnTo>
+                  <a:lnTo>
+                    <a:pt x="2992730" y="2908617"/>
+                  </a:lnTo>
+                  <a:lnTo>
+                    <a:pt x="3064353" y="2918497"/>
+                  </a:lnTo>
+                  <a:lnTo>
+                    <a:pt x="3135975" y="2928207"/>
+                  </a:lnTo>
+                  <a:lnTo>
+                    <a:pt x="3207598" y="2937750"/>
+                  </a:lnTo>
+                  <a:lnTo>
+                    <a:pt x="3279220" y="2947130"/>
+                  </a:lnTo>
+                  <a:lnTo>
+                    <a:pt x="3350843" y="2956348"/>
+                  </a:lnTo>
+                  <a:lnTo>
+                    <a:pt x="3422465" y="2965408"/>
+                  </a:lnTo>
+                  <a:lnTo>
+                    <a:pt x="3494088" y="2974312"/>
+                  </a:lnTo>
+                  <a:lnTo>
+                    <a:pt x="3565711" y="2983063"/>
+                  </a:lnTo>
+                  <a:lnTo>
+                    <a:pt x="3637333" y="2991664"/>
+                  </a:lnTo>
+                  <a:lnTo>
+                    <a:pt x="3708956" y="3000117"/>
+                  </a:lnTo>
+                  <a:lnTo>
+                    <a:pt x="3780578" y="3008425"/>
+                  </a:lnTo>
+                  <a:lnTo>
+                    <a:pt x="3852201" y="3016590"/>
+                  </a:lnTo>
+                  <a:lnTo>
+                    <a:pt x="3923823" y="3024615"/>
+                  </a:lnTo>
+                  <a:lnTo>
+                    <a:pt x="3995446" y="3032503"/>
+                  </a:lnTo>
+                  <a:lnTo>
+                    <a:pt x="4067068" y="3040254"/>
+                  </a:lnTo>
+                  <a:lnTo>
+                    <a:pt x="4138691" y="3047873"/>
+                  </a:lnTo>
+                  <a:lnTo>
+                    <a:pt x="4210313" y="3055360"/>
+                  </a:lnTo>
+                  <a:lnTo>
+                    <a:pt x="4281936" y="3062719"/>
+                  </a:lnTo>
+                  <a:lnTo>
+                    <a:pt x="4353558" y="3069952"/>
+                  </a:lnTo>
+                  <a:lnTo>
+                    <a:pt x="4425181" y="3077060"/>
+                  </a:lnTo>
+                  <a:lnTo>
+                    <a:pt x="4496803" y="3084046"/>
+                  </a:lnTo>
+                  <a:lnTo>
+                    <a:pt x="4568426" y="3090912"/>
+                  </a:lnTo>
+                  <a:lnTo>
+                    <a:pt x="4640048" y="3097661"/>
+                  </a:lnTo>
+                  <a:lnTo>
+                    <a:pt x="4711671" y="3104293"/>
+                  </a:lnTo>
+                  <a:lnTo>
+                    <a:pt x="4783293" y="3110811"/>
+                  </a:lnTo>
+                  <a:lnTo>
+                    <a:pt x="4854916" y="3117218"/>
+                  </a:lnTo>
+                  <a:lnTo>
+                    <a:pt x="4926539" y="3123514"/>
+                  </a:lnTo>
+                  <a:lnTo>
+                    <a:pt x="4998161" y="3129702"/>
+                  </a:lnTo>
+                  <a:lnTo>
+                    <a:pt x="5069784" y="3135784"/>
+                  </a:lnTo>
+                  <a:lnTo>
+                    <a:pt x="5141406" y="3141762"/>
+                  </a:lnTo>
+                  <a:lnTo>
+                    <a:pt x="5213029" y="3147636"/>
+                  </a:lnTo>
+                  <a:lnTo>
+                    <a:pt x="5284651" y="3153410"/>
+                  </a:lnTo>
+                  <a:lnTo>
+                    <a:pt x="5356274" y="3159085"/>
+                  </a:lnTo>
+                  <a:lnTo>
+                    <a:pt x="5427896" y="3164662"/>
                   </a:lnTo>
                 </a:path>
               </a:pathLst>
@@ -4207,309 +4207,309 @@
           </p:nvSpPr>
           <p:spPr>
             <a:xfrm>
-              <a:off x="1172049" y="3764593"/>
-              <a:ext cx="7090630" cy="1775282"/>
+              <a:off x="1172049" y="3783431"/>
+              <a:ext cx="7090630" cy="1755812"/>
             </a:xfrm>
             <a:custGeom>
               <a:avLst/>
               <a:pathLst>
-                <a:path w="7090630" h="1775282">
+                <a:path w="7090630" h="1755812">
                   <a:moveTo>
-                    <a:pt x="7090630" y="1775282"/>
+                    <a:pt x="7090630" y="1755812"/>
                   </a:moveTo>
                   <a:lnTo>
-                    <a:pt x="7019007" y="1774020"/>
-                  </a:lnTo>
-                  <a:lnTo>
-                    <a:pt x="6947385" y="1772667"/>
-                  </a:lnTo>
-                  <a:lnTo>
-                    <a:pt x="6875762" y="1771215"/>
-                  </a:lnTo>
-                  <a:lnTo>
-                    <a:pt x="6804139" y="1769658"/>
-                  </a:lnTo>
-                  <a:lnTo>
-                    <a:pt x="6732517" y="1767987"/>
-                  </a:lnTo>
-                  <a:lnTo>
-                    <a:pt x="6660894" y="1766196"/>
-                  </a:lnTo>
-                  <a:lnTo>
-                    <a:pt x="6589272" y="1764274"/>
-                  </a:lnTo>
-                  <a:lnTo>
-                    <a:pt x="6517649" y="1762212"/>
-                  </a:lnTo>
-                  <a:lnTo>
-                    <a:pt x="6446027" y="1760001"/>
-                  </a:lnTo>
-                  <a:lnTo>
-                    <a:pt x="6374404" y="1757629"/>
-                  </a:lnTo>
-                  <a:lnTo>
-                    <a:pt x="6302782" y="1755086"/>
-                  </a:lnTo>
-                  <a:lnTo>
-                    <a:pt x="6231159" y="1752357"/>
-                  </a:lnTo>
-                  <a:lnTo>
-                    <a:pt x="6159537" y="1749430"/>
-                  </a:lnTo>
-                  <a:lnTo>
-                    <a:pt x="6087914" y="1746290"/>
-                  </a:lnTo>
-                  <a:lnTo>
-                    <a:pt x="6016292" y="1742923"/>
-                  </a:lnTo>
-                  <a:lnTo>
-                    <a:pt x="5944669" y="1739311"/>
-                  </a:lnTo>
-                  <a:lnTo>
-                    <a:pt x="5873047" y="1735436"/>
-                  </a:lnTo>
-                  <a:lnTo>
-                    <a:pt x="5801424" y="1731280"/>
-                  </a:lnTo>
-                  <a:lnTo>
-                    <a:pt x="5729802" y="1726823"/>
-                  </a:lnTo>
-                  <a:lnTo>
-                    <a:pt x="5658179" y="1722041"/>
-                  </a:lnTo>
-                  <a:lnTo>
-                    <a:pt x="5586557" y="1716912"/>
-                  </a:lnTo>
-                  <a:lnTo>
-                    <a:pt x="5514934" y="1711411"/>
-                  </a:lnTo>
-                  <a:lnTo>
-                    <a:pt x="5443311" y="1705510"/>
-                  </a:lnTo>
-                  <a:lnTo>
-                    <a:pt x="5371689" y="1699181"/>
-                  </a:lnTo>
-                  <a:lnTo>
-                    <a:pt x="5300066" y="1692392"/>
-                  </a:lnTo>
-                  <a:lnTo>
-                    <a:pt x="5228444" y="1685110"/>
-                  </a:lnTo>
-                  <a:lnTo>
-                    <a:pt x="5156821" y="1677299"/>
-                  </a:lnTo>
-                  <a:lnTo>
-                    <a:pt x="5085199" y="1668920"/>
-                  </a:lnTo>
-                  <a:lnTo>
-                    <a:pt x="5013576" y="1659933"/>
-                  </a:lnTo>
-                  <a:lnTo>
-                    <a:pt x="4941954" y="1650294"/>
-                  </a:lnTo>
-                  <a:lnTo>
-                    <a:pt x="4870331" y="1639954"/>
-                  </a:lnTo>
-                  <a:lnTo>
-                    <a:pt x="4798709" y="1628863"/>
-                  </a:lnTo>
-                  <a:lnTo>
-                    <a:pt x="4727086" y="1616967"/>
-                  </a:lnTo>
-                  <a:lnTo>
-                    <a:pt x="4655464" y="1604207"/>
-                  </a:lnTo>
-                  <a:lnTo>
-                    <a:pt x="4583841" y="1590520"/>
-                  </a:lnTo>
-                  <a:lnTo>
-                    <a:pt x="4512219" y="1575839"/>
-                  </a:lnTo>
-                  <a:lnTo>
-                    <a:pt x="4440596" y="1560091"/>
-                  </a:lnTo>
-                  <a:lnTo>
-                    <a:pt x="4368974" y="1543200"/>
-                  </a:lnTo>
-                  <a:lnTo>
-                    <a:pt x="4297351" y="1525083"/>
-                  </a:lnTo>
-                  <a:lnTo>
-                    <a:pt x="4225729" y="1505649"/>
-                  </a:lnTo>
-                  <a:lnTo>
-                    <a:pt x="4154106" y="1484803"/>
-                  </a:lnTo>
-                  <a:lnTo>
-                    <a:pt x="4082483" y="1462444"/>
-                  </a:lnTo>
-                  <a:lnTo>
-                    <a:pt x="4010861" y="1438461"/>
-                  </a:lnTo>
-                  <a:lnTo>
-                    <a:pt x="3939238" y="1412736"/>
-                  </a:lnTo>
-                  <a:lnTo>
-                    <a:pt x="3867616" y="1385143"/>
-                  </a:lnTo>
-                  <a:lnTo>
-                    <a:pt x="3795993" y="1355545"/>
-                  </a:lnTo>
-                  <a:lnTo>
-                    <a:pt x="3724371" y="1323798"/>
-                  </a:lnTo>
-                  <a:lnTo>
-                    <a:pt x="3652748" y="1289745"/>
-                  </a:lnTo>
-                  <a:lnTo>
-                    <a:pt x="3581126" y="1253219"/>
-                  </a:lnTo>
-                  <a:lnTo>
-                    <a:pt x="3509503" y="1214039"/>
-                  </a:lnTo>
-                  <a:lnTo>
-                    <a:pt x="3437881" y="1172015"/>
-                  </a:lnTo>
-                  <a:lnTo>
-                    <a:pt x="3366258" y="1126938"/>
-                  </a:lnTo>
-                  <a:lnTo>
-                    <a:pt x="3294636" y="1078587"/>
-                  </a:lnTo>
-                  <a:lnTo>
-                    <a:pt x="3223013" y="1026724"/>
-                  </a:lnTo>
-                  <a:lnTo>
-                    <a:pt x="3151391" y="971095"/>
-                  </a:lnTo>
-                  <a:lnTo>
-                    <a:pt x="3079768" y="950513"/>
-                  </a:lnTo>
-                  <a:lnTo>
-                    <a:pt x="3008146" y="935586"/>
-                  </a:lnTo>
-                  <a:lnTo>
-                    <a:pt x="2936523" y="920394"/>
-                  </a:lnTo>
-                  <a:lnTo>
-                    <a:pt x="2864901" y="904933"/>
-                  </a:lnTo>
-                  <a:lnTo>
-                    <a:pt x="2793278" y="889198"/>
-                  </a:lnTo>
-                  <a:lnTo>
-                    <a:pt x="2721655" y="873184"/>
-                  </a:lnTo>
-                  <a:lnTo>
-                    <a:pt x="2650033" y="856887"/>
-                  </a:lnTo>
-                  <a:lnTo>
-                    <a:pt x="2578410" y="840300"/>
-                  </a:lnTo>
-                  <a:lnTo>
-                    <a:pt x="2506788" y="823419"/>
-                  </a:lnTo>
-                  <a:lnTo>
-                    <a:pt x="2435165" y="806240"/>
-                  </a:lnTo>
-                  <a:lnTo>
-                    <a:pt x="2363543" y="788755"/>
-                  </a:lnTo>
-                  <a:lnTo>
-                    <a:pt x="2291920" y="770961"/>
-                  </a:lnTo>
-                  <a:lnTo>
-                    <a:pt x="2220298" y="752851"/>
-                  </a:lnTo>
-                  <a:lnTo>
-                    <a:pt x="2148675" y="734421"/>
-                  </a:lnTo>
-                  <a:lnTo>
-                    <a:pt x="2077053" y="715663"/>
-                  </a:lnTo>
-                  <a:lnTo>
-                    <a:pt x="2005430" y="696573"/>
-                  </a:lnTo>
-                  <a:lnTo>
-                    <a:pt x="1933808" y="677145"/>
-                  </a:lnTo>
-                  <a:lnTo>
-                    <a:pt x="1862185" y="657373"/>
-                  </a:lnTo>
-                  <a:lnTo>
-                    <a:pt x="1790563" y="637250"/>
-                  </a:lnTo>
-                  <a:lnTo>
-                    <a:pt x="1718940" y="616770"/>
-                  </a:lnTo>
-                  <a:lnTo>
-                    <a:pt x="1647318" y="595927"/>
-                  </a:lnTo>
-                  <a:lnTo>
-                    <a:pt x="1575695" y="574715"/>
-                  </a:lnTo>
-                  <a:lnTo>
-                    <a:pt x="1504073" y="553127"/>
-                  </a:lnTo>
-                  <a:lnTo>
-                    <a:pt x="1432450" y="531156"/>
-                  </a:lnTo>
-                  <a:lnTo>
-                    <a:pt x="1360827" y="508796"/>
-                  </a:lnTo>
-                  <a:lnTo>
-                    <a:pt x="1289205" y="486039"/>
-                  </a:lnTo>
-                  <a:lnTo>
-                    <a:pt x="1217582" y="462879"/>
-                  </a:lnTo>
-                  <a:lnTo>
-                    <a:pt x="1145960" y="439309"/>
-                  </a:lnTo>
-                  <a:lnTo>
-                    <a:pt x="1074337" y="415321"/>
-                  </a:lnTo>
-                  <a:lnTo>
-                    <a:pt x="1002715" y="390907"/>
-                  </a:lnTo>
-                  <a:lnTo>
-                    <a:pt x="931092" y="366061"/>
-                  </a:lnTo>
-                  <a:lnTo>
-                    <a:pt x="859470" y="340775"/>
-                  </a:lnTo>
-                  <a:lnTo>
-                    <a:pt x="787847" y="315040"/>
-                  </a:lnTo>
-                  <a:lnTo>
-                    <a:pt x="716225" y="288849"/>
-                  </a:lnTo>
-                  <a:lnTo>
-                    <a:pt x="644602" y="262194"/>
-                  </a:lnTo>
-                  <a:lnTo>
-                    <a:pt x="572980" y="235066"/>
-                  </a:lnTo>
-                  <a:lnTo>
-                    <a:pt x="501357" y="207458"/>
-                  </a:lnTo>
-                  <a:lnTo>
-                    <a:pt x="429735" y="179360"/>
-                  </a:lnTo>
-                  <a:lnTo>
-                    <a:pt x="358112" y="150764"/>
-                  </a:lnTo>
-                  <a:lnTo>
-                    <a:pt x="286490" y="121661"/>
-                  </a:lnTo>
-                  <a:lnTo>
-                    <a:pt x="214867" y="92043"/>
-                  </a:lnTo>
-                  <a:lnTo>
-                    <a:pt x="143245" y="61899"/>
-                  </a:lnTo>
-                  <a:lnTo>
-                    <a:pt x="71622" y="31221"/>
+                    <a:pt x="7019007" y="1754517"/>
+                  </a:lnTo>
+                  <a:lnTo>
+                    <a:pt x="6947385" y="1753129"/>
+                  </a:lnTo>
+                  <a:lnTo>
+                    <a:pt x="6875762" y="1751640"/>
+                  </a:lnTo>
+                  <a:lnTo>
+                    <a:pt x="6804139" y="1750045"/>
+                  </a:lnTo>
+                  <a:lnTo>
+                    <a:pt x="6732517" y="1748334"/>
+                  </a:lnTo>
+                  <a:lnTo>
+                    <a:pt x="6660894" y="1746501"/>
+                  </a:lnTo>
+                  <a:lnTo>
+                    <a:pt x="6589272" y="1744536"/>
+                  </a:lnTo>
+                  <a:lnTo>
+                    <a:pt x="6517649" y="1742429"/>
+                  </a:lnTo>
+                  <a:lnTo>
+                    <a:pt x="6446027" y="1740171"/>
+                  </a:lnTo>
+                  <a:lnTo>
+                    <a:pt x="6374404" y="1737751"/>
+                  </a:lnTo>
+                  <a:lnTo>
+                    <a:pt x="6302782" y="1735156"/>
+                  </a:lnTo>
+                  <a:lnTo>
+                    <a:pt x="6231159" y="1732375"/>
+                  </a:lnTo>
+                  <a:lnTo>
+                    <a:pt x="6159537" y="1729393"/>
+                  </a:lnTo>
+                  <a:lnTo>
+                    <a:pt x="6087914" y="1726197"/>
+                  </a:lnTo>
+                  <a:lnTo>
+                    <a:pt x="6016292" y="1722772"/>
+                  </a:lnTo>
+                  <a:lnTo>
+                    <a:pt x="5944669" y="1719099"/>
+                  </a:lnTo>
+                  <a:lnTo>
+                    <a:pt x="5873047" y="1715163"/>
+                  </a:lnTo>
+                  <a:lnTo>
+                    <a:pt x="5801424" y="1710943"/>
+                  </a:lnTo>
+                  <a:lnTo>
+                    <a:pt x="5729802" y="1706420"/>
+                  </a:lnTo>
+                  <a:lnTo>
+                    <a:pt x="5658179" y="1701571"/>
+                  </a:lnTo>
+                  <a:lnTo>
+                    <a:pt x="5586557" y="1696374"/>
+                  </a:lnTo>
+                  <a:lnTo>
+                    <a:pt x="5514934" y="1690803"/>
+                  </a:lnTo>
+                  <a:lnTo>
+                    <a:pt x="5443311" y="1684831"/>
+                  </a:lnTo>
+                  <a:lnTo>
+                    <a:pt x="5371689" y="1678429"/>
+                  </a:lnTo>
+                  <a:lnTo>
+                    <a:pt x="5300066" y="1671567"/>
+                  </a:lnTo>
+                  <a:lnTo>
+                    <a:pt x="5228444" y="1664211"/>
+                  </a:lnTo>
+                  <a:lnTo>
+                    <a:pt x="5156821" y="1656325"/>
+                  </a:lnTo>
+                  <a:lnTo>
+                    <a:pt x="5085199" y="1647873"/>
+                  </a:lnTo>
+                  <a:lnTo>
+                    <a:pt x="5013576" y="1638812"/>
+                  </a:lnTo>
+                  <a:lnTo>
+                    <a:pt x="4941954" y="1629100"/>
+                  </a:lnTo>
+                  <a:lnTo>
+                    <a:pt x="4870331" y="1618689"/>
+                  </a:lnTo>
+                  <a:lnTo>
+                    <a:pt x="4798709" y="1607529"/>
+                  </a:lnTo>
+                  <a:lnTo>
+                    <a:pt x="4727086" y="1595566"/>
+                  </a:lnTo>
+                  <a:lnTo>
+                    <a:pt x="4655464" y="1582743"/>
+                  </a:lnTo>
+                  <a:lnTo>
+                    <a:pt x="4583841" y="1568997"/>
+                  </a:lnTo>
+                  <a:lnTo>
+                    <a:pt x="4512219" y="1554262"/>
+                  </a:lnTo>
+                  <a:lnTo>
+                    <a:pt x="4440596" y="1538467"/>
+                  </a:lnTo>
+                  <a:lnTo>
+                    <a:pt x="4368974" y="1521536"/>
+                  </a:lnTo>
+                  <a:lnTo>
+                    <a:pt x="4297351" y="1503387"/>
+                  </a:lnTo>
+                  <a:lnTo>
+                    <a:pt x="4225729" y="1483932"/>
+                  </a:lnTo>
+                  <a:lnTo>
+                    <a:pt x="4154106" y="1463078"/>
+                  </a:lnTo>
+                  <a:lnTo>
+                    <a:pt x="4082483" y="1440723"/>
+                  </a:lnTo>
+                  <a:lnTo>
+                    <a:pt x="4010861" y="1416760"/>
+                  </a:lnTo>
+                  <a:lnTo>
+                    <a:pt x="3939238" y="1391073"/>
+                  </a:lnTo>
+                  <a:lnTo>
+                    <a:pt x="3867616" y="1363539"/>
+                  </a:lnTo>
+                  <a:lnTo>
+                    <a:pt x="3795993" y="1334023"/>
+                  </a:lnTo>
+                  <a:lnTo>
+                    <a:pt x="3724371" y="1302384"/>
+                  </a:lnTo>
+                  <a:lnTo>
+                    <a:pt x="3652748" y="1268469"/>
+                  </a:lnTo>
+                  <a:lnTo>
+                    <a:pt x="3581126" y="1232114"/>
+                  </a:lnTo>
+                  <a:lnTo>
+                    <a:pt x="3509503" y="1193144"/>
+                  </a:lnTo>
+                  <a:lnTo>
+                    <a:pt x="3437881" y="1151371"/>
+                  </a:lnTo>
+                  <a:lnTo>
+                    <a:pt x="3366258" y="1106592"/>
+                  </a:lnTo>
+                  <a:lnTo>
+                    <a:pt x="3294636" y="1058591"/>
+                  </a:lnTo>
+                  <a:lnTo>
+                    <a:pt x="3223013" y="1007138"/>
+                  </a:lnTo>
+                  <a:lnTo>
+                    <a:pt x="3151391" y="951983"/>
+                  </a:lnTo>
+                  <a:lnTo>
+                    <a:pt x="3079768" y="931799"/>
+                  </a:lnTo>
+                  <a:lnTo>
+                    <a:pt x="3008146" y="917082"/>
+                  </a:lnTo>
+                  <a:lnTo>
+                    <a:pt x="2936523" y="902107"/>
+                  </a:lnTo>
+                  <a:lnTo>
+                    <a:pt x="2864901" y="886871"/>
+                  </a:lnTo>
+                  <a:lnTo>
+                    <a:pt x="2793278" y="871368"/>
+                  </a:lnTo>
+                  <a:lnTo>
+                    <a:pt x="2721655" y="855595"/>
+                  </a:lnTo>
+                  <a:lnTo>
+                    <a:pt x="2650033" y="839546"/>
+                  </a:lnTo>
+                  <a:lnTo>
+                    <a:pt x="2578410" y="823216"/>
+                  </a:lnTo>
+                  <a:lnTo>
+                    <a:pt x="2506788" y="806601"/>
+                  </a:lnTo>
+                  <a:lnTo>
+                    <a:pt x="2435165" y="789695"/>
+                  </a:lnTo>
+                  <a:lnTo>
+                    <a:pt x="2363543" y="772494"/>
+                  </a:lnTo>
+                  <a:lnTo>
+                    <a:pt x="2291920" y="754992"/>
+                  </a:lnTo>
+                  <a:lnTo>
+                    <a:pt x="2220298" y="737184"/>
+                  </a:lnTo>
+                  <a:lnTo>
+                    <a:pt x="2148675" y="719066"/>
+                  </a:lnTo>
+                  <a:lnTo>
+                    <a:pt x="2077053" y="700630"/>
+                  </a:lnTo>
+                  <a:lnTo>
+                    <a:pt x="2005430" y="681872"/>
+                  </a:lnTo>
+                  <a:lnTo>
+                    <a:pt x="1933808" y="662786"/>
+                  </a:lnTo>
+                  <a:lnTo>
+                    <a:pt x="1862185" y="643367"/>
+                  </a:lnTo>
+                  <a:lnTo>
+                    <a:pt x="1790563" y="623608"/>
+                  </a:lnTo>
+                  <a:lnTo>
+                    <a:pt x="1718940" y="603504"/>
+                  </a:lnTo>
+                  <a:lnTo>
+                    <a:pt x="1647318" y="583049"/>
+                  </a:lnTo>
+                  <a:lnTo>
+                    <a:pt x="1575695" y="562236"/>
+                  </a:lnTo>
+                  <a:lnTo>
+                    <a:pt x="1504073" y="541059"/>
+                  </a:lnTo>
+                  <a:lnTo>
+                    <a:pt x="1432450" y="519512"/>
+                  </a:lnTo>
+                  <a:lnTo>
+                    <a:pt x="1360827" y="497589"/>
+                  </a:lnTo>
+                  <a:lnTo>
+                    <a:pt x="1289205" y="475282"/>
+                  </a:lnTo>
+                  <a:lnTo>
+                    <a:pt x="1217582" y="452585"/>
+                  </a:lnTo>
+                  <a:lnTo>
+                    <a:pt x="1145960" y="429492"/>
+                  </a:lnTo>
+                  <a:lnTo>
+                    <a:pt x="1074337" y="405995"/>
+                  </a:lnTo>
+                  <a:lnTo>
+                    <a:pt x="1002715" y="382087"/>
+                  </a:lnTo>
+                  <a:lnTo>
+                    <a:pt x="931092" y="357762"/>
+                  </a:lnTo>
+                  <a:lnTo>
+                    <a:pt x="859470" y="333011"/>
+                  </a:lnTo>
+                  <a:lnTo>
+                    <a:pt x="787847" y="307828"/>
+                  </a:lnTo>
+                  <a:lnTo>
+                    <a:pt x="716225" y="282205"/>
+                  </a:lnTo>
+                  <a:lnTo>
+                    <a:pt x="644602" y="256133"/>
+                  </a:lnTo>
+                  <a:lnTo>
+                    <a:pt x="572980" y="229606"/>
+                  </a:lnTo>
+                  <a:lnTo>
+                    <a:pt x="501357" y="202615"/>
+                  </a:lnTo>
+                  <a:lnTo>
+                    <a:pt x="429735" y="175153"/>
+                  </a:lnTo>
+                  <a:lnTo>
+                    <a:pt x="358112" y="147211"/>
+                  </a:lnTo>
+                  <a:lnTo>
+                    <a:pt x="286490" y="118780"/>
+                  </a:lnTo>
+                  <a:lnTo>
+                    <a:pt x="214867" y="89852"/>
+                  </a:lnTo>
+                  <a:lnTo>
+                    <a:pt x="143245" y="60419"/>
+                  </a:lnTo>
+                  <a:lnTo>
+                    <a:pt x="71622" y="30471"/>
                   </a:lnTo>
                   <a:lnTo>
                     <a:pt x="0" y="0"/>
@@ -4532,279 +4532,282 @@
           </p:nvSpPr>
           <p:spPr>
             <a:xfrm>
-              <a:off x="1969388" y="2073503"/>
-              <a:ext cx="6293290" cy="3409788"/>
+              <a:off x="1945798" y="2073503"/>
+              <a:ext cx="6316880" cy="3407949"/>
             </a:xfrm>
             <a:custGeom>
               <a:avLst/>
               <a:pathLst>
-                <a:path w="6293290" h="3409788">
+                <a:path w="6316880" h="3407949">
                   <a:moveTo>
                     <a:pt x="0" y="0"/>
                   </a:moveTo>
                   <a:lnTo>
-                    <a:pt x="62131" y="130371"/>
-                  </a:lnTo>
-                  <a:lnTo>
-                    <a:pt x="133753" y="274212"/>
-                  </a:lnTo>
-                  <a:lnTo>
-                    <a:pt x="205376" y="411883"/>
-                  </a:lnTo>
-                  <a:lnTo>
-                    <a:pt x="276998" y="543649"/>
-                  </a:lnTo>
-                  <a:lnTo>
-                    <a:pt x="348621" y="669762"/>
-                  </a:lnTo>
-                  <a:lnTo>
-                    <a:pt x="420243" y="790467"/>
-                  </a:lnTo>
-                  <a:lnTo>
-                    <a:pt x="491866" y="905993"/>
-                  </a:lnTo>
-                  <a:lnTo>
-                    <a:pt x="563488" y="1016564"/>
-                  </a:lnTo>
-                  <a:lnTo>
-                    <a:pt x="635111" y="1122393"/>
-                  </a:lnTo>
-                  <a:lnTo>
-                    <a:pt x="706733" y="1223681"/>
-                  </a:lnTo>
-                  <a:lnTo>
-                    <a:pt x="778356" y="1320626"/>
-                  </a:lnTo>
-                  <a:lnTo>
-                    <a:pt x="849978" y="1413411"/>
-                  </a:lnTo>
-                  <a:lnTo>
-                    <a:pt x="921601" y="1502217"/>
-                  </a:lnTo>
-                  <a:lnTo>
-                    <a:pt x="993224" y="1587214"/>
-                  </a:lnTo>
-                  <a:lnTo>
-                    <a:pt x="1064846" y="1668564"/>
-                  </a:lnTo>
-                  <a:lnTo>
-                    <a:pt x="1136469" y="1746425"/>
-                  </a:lnTo>
-                  <a:lnTo>
-                    <a:pt x="1208091" y="1820947"/>
-                  </a:lnTo>
-                  <a:lnTo>
-                    <a:pt x="1279714" y="1892271"/>
-                  </a:lnTo>
-                  <a:lnTo>
-                    <a:pt x="1351336" y="1960537"/>
-                  </a:lnTo>
-                  <a:lnTo>
-                    <a:pt x="1422959" y="2025874"/>
-                  </a:lnTo>
-                  <a:lnTo>
-                    <a:pt x="1494581" y="2088408"/>
-                  </a:lnTo>
-                  <a:lnTo>
-                    <a:pt x="1566204" y="2148261"/>
-                  </a:lnTo>
-                  <a:lnTo>
-                    <a:pt x="1637826" y="2205545"/>
-                  </a:lnTo>
-                  <a:lnTo>
-                    <a:pt x="1709449" y="2260373"/>
-                  </a:lnTo>
-                  <a:lnTo>
-                    <a:pt x="1781071" y="2312849"/>
-                  </a:lnTo>
-                  <a:lnTo>
-                    <a:pt x="1852694" y="2363074"/>
-                  </a:lnTo>
-                  <a:lnTo>
-                    <a:pt x="1924316" y="2411144"/>
-                  </a:lnTo>
-                  <a:lnTo>
-                    <a:pt x="1995939" y="2457153"/>
-                  </a:lnTo>
-                  <a:lnTo>
-                    <a:pt x="2067561" y="2501188"/>
-                  </a:lnTo>
-                  <a:lnTo>
-                    <a:pt x="2139184" y="2543334"/>
-                  </a:lnTo>
-                  <a:lnTo>
-                    <a:pt x="2210806" y="2583673"/>
-                  </a:lnTo>
-                  <a:lnTo>
-                    <a:pt x="2282429" y="2622281"/>
-                  </a:lnTo>
-                  <a:lnTo>
-                    <a:pt x="2354052" y="2659233"/>
-                  </a:lnTo>
-                  <a:lnTo>
-                    <a:pt x="2425674" y="2694600"/>
-                  </a:lnTo>
-                  <a:lnTo>
-                    <a:pt x="2497297" y="2728450"/>
-                  </a:lnTo>
-                  <a:lnTo>
-                    <a:pt x="2568919" y="2760848"/>
-                  </a:lnTo>
-                  <a:lnTo>
-                    <a:pt x="2640542" y="2791856"/>
-                  </a:lnTo>
-                  <a:lnTo>
-                    <a:pt x="2712164" y="2821534"/>
-                  </a:lnTo>
-                  <a:lnTo>
-                    <a:pt x="2783787" y="2849940"/>
-                  </a:lnTo>
-                  <a:lnTo>
-                    <a:pt x="2855409" y="2877126"/>
-                  </a:lnTo>
-                  <a:lnTo>
-                    <a:pt x="2927032" y="2903147"/>
-                  </a:lnTo>
-                  <a:lnTo>
-                    <a:pt x="2998654" y="2928051"/>
-                  </a:lnTo>
-                  <a:lnTo>
-                    <a:pt x="3070277" y="2951888"/>
-                  </a:lnTo>
-                  <a:lnTo>
-                    <a:pt x="3141899" y="2974701"/>
-                  </a:lnTo>
-                  <a:lnTo>
-                    <a:pt x="3213522" y="2996537"/>
-                  </a:lnTo>
-                  <a:lnTo>
-                    <a:pt x="3285144" y="3017435"/>
-                  </a:lnTo>
-                  <a:lnTo>
-                    <a:pt x="3356767" y="3037437"/>
-                  </a:lnTo>
-                  <a:lnTo>
-                    <a:pt x="3428389" y="3056581"/>
-                  </a:lnTo>
-                  <a:lnTo>
-                    <a:pt x="3500012" y="3074904"/>
-                  </a:lnTo>
-                  <a:lnTo>
-                    <a:pt x="3571634" y="3092441"/>
-                  </a:lnTo>
-                  <a:lnTo>
-                    <a:pt x="3643257" y="3109226"/>
-                  </a:lnTo>
-                  <a:lnTo>
-                    <a:pt x="3714880" y="3125291"/>
-                  </a:lnTo>
-                  <a:lnTo>
-                    <a:pt x="3786502" y="3140667"/>
-                  </a:lnTo>
-                  <a:lnTo>
-                    <a:pt x="3858125" y="3155383"/>
-                  </a:lnTo>
-                  <a:lnTo>
-                    <a:pt x="3929747" y="3169468"/>
-                  </a:lnTo>
-                  <a:lnTo>
-                    <a:pt x="4001370" y="3182949"/>
-                  </a:lnTo>
-                  <a:lnTo>
-                    <a:pt x="4072992" y="3195851"/>
-                  </a:lnTo>
-                  <a:lnTo>
-                    <a:pt x="4144615" y="3208200"/>
-                  </a:lnTo>
-                  <a:lnTo>
-                    <a:pt x="4216237" y="3220020"/>
-                  </a:lnTo>
-                  <a:lnTo>
-                    <a:pt x="4287860" y="3231332"/>
-                  </a:lnTo>
-                  <a:lnTo>
-                    <a:pt x="4359482" y="3242159"/>
-                  </a:lnTo>
-                  <a:lnTo>
-                    <a:pt x="4431105" y="3252522"/>
-                  </a:lnTo>
-                  <a:lnTo>
-                    <a:pt x="4502727" y="3262440"/>
-                  </a:lnTo>
-                  <a:lnTo>
-                    <a:pt x="4574350" y="3271933"/>
-                  </a:lnTo>
-                  <a:lnTo>
-                    <a:pt x="4645972" y="3281019"/>
-                  </a:lnTo>
-                  <a:lnTo>
-                    <a:pt x="4717595" y="3289714"/>
-                  </a:lnTo>
-                  <a:lnTo>
-                    <a:pt x="4789217" y="3298037"/>
-                  </a:lnTo>
-                  <a:lnTo>
-                    <a:pt x="4860840" y="3306003"/>
-                  </a:lnTo>
-                  <a:lnTo>
-                    <a:pt x="4932462" y="3313627"/>
-                  </a:lnTo>
-                  <a:lnTo>
-                    <a:pt x="5004085" y="3320925"/>
-                  </a:lnTo>
-                  <a:lnTo>
-                    <a:pt x="5075708" y="3327909"/>
-                  </a:lnTo>
-                  <a:lnTo>
-                    <a:pt x="5147330" y="3334593"/>
-                  </a:lnTo>
-                  <a:lnTo>
-                    <a:pt x="5218953" y="3340991"/>
-                  </a:lnTo>
-                  <a:lnTo>
-                    <a:pt x="5290575" y="3347115"/>
-                  </a:lnTo>
-                  <a:lnTo>
-                    <a:pt x="5362198" y="3352975"/>
-                  </a:lnTo>
-                  <a:lnTo>
-                    <a:pt x="5433820" y="3358585"/>
-                  </a:lnTo>
-                  <a:lnTo>
-                    <a:pt x="5505443" y="3363953"/>
-                  </a:lnTo>
-                  <a:lnTo>
-                    <a:pt x="5577065" y="3369092"/>
-                  </a:lnTo>
-                  <a:lnTo>
-                    <a:pt x="5648688" y="3374010"/>
-                  </a:lnTo>
-                  <a:lnTo>
-                    <a:pt x="5720310" y="3378717"/>
-                  </a:lnTo>
-                  <a:lnTo>
-                    <a:pt x="5791933" y="3383222"/>
-                  </a:lnTo>
-                  <a:lnTo>
-                    <a:pt x="5863555" y="3387534"/>
-                  </a:lnTo>
-                  <a:lnTo>
-                    <a:pt x="5935178" y="3391661"/>
-                  </a:lnTo>
-                  <a:lnTo>
-                    <a:pt x="6006800" y="3395611"/>
-                  </a:lnTo>
-                  <a:lnTo>
-                    <a:pt x="6078423" y="3399391"/>
-                  </a:lnTo>
-                  <a:lnTo>
-                    <a:pt x="6150045" y="3403010"/>
-                  </a:lnTo>
-                  <a:lnTo>
-                    <a:pt x="6221668" y="3406473"/>
-                  </a:lnTo>
-                  <a:lnTo>
-                    <a:pt x="6293290" y="3409788"/>
+                    <a:pt x="14098" y="30152"/>
+                  </a:lnTo>
+                  <a:lnTo>
+                    <a:pt x="85720" y="176828"/>
+                  </a:lnTo>
+                  <a:lnTo>
+                    <a:pt x="157343" y="317275"/>
+                  </a:lnTo>
+                  <a:lnTo>
+                    <a:pt x="228965" y="451757"/>
+                  </a:lnTo>
+                  <a:lnTo>
+                    <a:pt x="300588" y="580528"/>
+                  </a:lnTo>
+                  <a:lnTo>
+                    <a:pt x="372210" y="703829"/>
+                  </a:lnTo>
+                  <a:lnTo>
+                    <a:pt x="443833" y="821894"/>
+                  </a:lnTo>
+                  <a:lnTo>
+                    <a:pt x="515455" y="934945"/>
+                  </a:lnTo>
+                  <a:lnTo>
+                    <a:pt x="587078" y="1043194"/>
+                  </a:lnTo>
+                  <a:lnTo>
+                    <a:pt x="658700" y="1146846"/>
+                  </a:lnTo>
+                  <a:lnTo>
+                    <a:pt x="730323" y="1246096"/>
+                  </a:lnTo>
+                  <a:lnTo>
+                    <a:pt x="801946" y="1341130"/>
+                  </a:lnTo>
+                  <a:lnTo>
+                    <a:pt x="873568" y="1432128"/>
+                  </a:lnTo>
+                  <a:lnTo>
+                    <a:pt x="945191" y="1519262"/>
+                  </a:lnTo>
+                  <a:lnTo>
+                    <a:pt x="1016813" y="1602695"/>
+                  </a:lnTo>
+                  <a:lnTo>
+                    <a:pt x="1088436" y="1682584"/>
+                  </a:lnTo>
+                  <a:lnTo>
+                    <a:pt x="1160058" y="1759081"/>
+                  </a:lnTo>
+                  <a:lnTo>
+                    <a:pt x="1231681" y="1832328"/>
+                  </a:lnTo>
+                  <a:lnTo>
+                    <a:pt x="1303303" y="1902465"/>
+                  </a:lnTo>
+                  <a:lnTo>
+                    <a:pt x="1374926" y="1969623"/>
+                  </a:lnTo>
+                  <a:lnTo>
+                    <a:pt x="1446548" y="2033929"/>
+                  </a:lnTo>
+                  <a:lnTo>
+                    <a:pt x="1518171" y="2095504"/>
+                  </a:lnTo>
+                  <a:lnTo>
+                    <a:pt x="1589793" y="2154463"/>
+                  </a:lnTo>
+                  <a:lnTo>
+                    <a:pt x="1661416" y="2210919"/>
+                  </a:lnTo>
+                  <a:lnTo>
+                    <a:pt x="1733038" y="2264977"/>
+                  </a:lnTo>
+                  <a:lnTo>
+                    <a:pt x="1804661" y="2316739"/>
+                  </a:lnTo>
+                  <a:lnTo>
+                    <a:pt x="1876283" y="2366302"/>
+                  </a:lnTo>
+                  <a:lnTo>
+                    <a:pt x="1947906" y="2413761"/>
+                  </a:lnTo>
+                  <a:lnTo>
+                    <a:pt x="2019528" y="2459204"/>
+                  </a:lnTo>
+                  <a:lnTo>
+                    <a:pt x="2091151" y="2502717"/>
+                  </a:lnTo>
+                  <a:lnTo>
+                    <a:pt x="2162774" y="2544382"/>
+                  </a:lnTo>
+                  <a:lnTo>
+                    <a:pt x="2234396" y="2584277"/>
+                  </a:lnTo>
+                  <a:lnTo>
+                    <a:pt x="2306019" y="2622478"/>
+                  </a:lnTo>
+                  <a:lnTo>
+                    <a:pt x="2377641" y="2659057"/>
+                  </a:lnTo>
+                  <a:lnTo>
+                    <a:pt x="2449264" y="2694082"/>
+                  </a:lnTo>
+                  <a:lnTo>
+                    <a:pt x="2520886" y="2727619"/>
+                  </a:lnTo>
+                  <a:lnTo>
+                    <a:pt x="2592509" y="2759733"/>
+                  </a:lnTo>
+                  <a:lnTo>
+                    <a:pt x="2664131" y="2790482"/>
+                  </a:lnTo>
+                  <a:lnTo>
+                    <a:pt x="2735754" y="2819925"/>
+                  </a:lnTo>
+                  <a:lnTo>
+                    <a:pt x="2807376" y="2848118"/>
+                  </a:lnTo>
+                  <a:lnTo>
+                    <a:pt x="2878999" y="2875114"/>
+                  </a:lnTo>
+                  <a:lnTo>
+                    <a:pt x="2950621" y="2900963"/>
+                  </a:lnTo>
+                  <a:lnTo>
+                    <a:pt x="3022244" y="2925714"/>
+                  </a:lnTo>
+                  <a:lnTo>
+                    <a:pt x="3093866" y="2949414"/>
+                  </a:lnTo>
+                  <a:lnTo>
+                    <a:pt x="3165489" y="2972107"/>
+                  </a:lnTo>
+                  <a:lnTo>
+                    <a:pt x="3237111" y="2993837"/>
+                  </a:lnTo>
+                  <a:lnTo>
+                    <a:pt x="3308734" y="3014644"/>
+                  </a:lnTo>
+                  <a:lnTo>
+                    <a:pt x="3380356" y="3034567"/>
+                  </a:lnTo>
+                  <a:lnTo>
+                    <a:pt x="3451979" y="3053644"/>
+                  </a:lnTo>
+                  <a:lnTo>
+                    <a:pt x="3523602" y="3071911"/>
+                  </a:lnTo>
+                  <a:lnTo>
+                    <a:pt x="3595224" y="3089402"/>
+                  </a:lnTo>
+                  <a:lnTo>
+                    <a:pt x="3666847" y="3106150"/>
+                  </a:lnTo>
+                  <a:lnTo>
+                    <a:pt x="3738469" y="3122186"/>
+                  </a:lnTo>
+                  <a:lnTo>
+                    <a:pt x="3810092" y="3137542"/>
+                  </a:lnTo>
+                  <a:lnTo>
+                    <a:pt x="3881714" y="3152246"/>
+                  </a:lnTo>
+                  <a:lnTo>
+                    <a:pt x="3953337" y="3166325"/>
+                  </a:lnTo>
+                  <a:lnTo>
+                    <a:pt x="4024959" y="3179806"/>
+                  </a:lnTo>
+                  <a:lnTo>
+                    <a:pt x="4096582" y="3192714"/>
+                  </a:lnTo>
+                  <a:lnTo>
+                    <a:pt x="4168204" y="3205075"/>
+                  </a:lnTo>
+                  <a:lnTo>
+                    <a:pt x="4239827" y="3216910"/>
+                  </a:lnTo>
+                  <a:lnTo>
+                    <a:pt x="4311449" y="3228243"/>
+                  </a:lnTo>
+                  <a:lnTo>
+                    <a:pt x="4383072" y="3239094"/>
+                  </a:lnTo>
+                  <a:lnTo>
+                    <a:pt x="4454694" y="3249485"/>
+                  </a:lnTo>
+                  <a:lnTo>
+                    <a:pt x="4526317" y="3259434"/>
+                  </a:lnTo>
+                  <a:lnTo>
+                    <a:pt x="4597939" y="3268961"/>
+                  </a:lnTo>
+                  <a:lnTo>
+                    <a:pt x="4669562" y="3278083"/>
+                  </a:lnTo>
+                  <a:lnTo>
+                    <a:pt x="4741184" y="3286817"/>
+                  </a:lnTo>
+                  <a:lnTo>
+                    <a:pt x="4812807" y="3295181"/>
+                  </a:lnTo>
+                  <a:lnTo>
+                    <a:pt x="4884430" y="3303190"/>
+                  </a:lnTo>
+                  <a:lnTo>
+                    <a:pt x="4956052" y="3310858"/>
+                  </a:lnTo>
+                  <a:lnTo>
+                    <a:pt x="5027675" y="3318201"/>
+                  </a:lnTo>
+                  <a:lnTo>
+                    <a:pt x="5099297" y="3325231"/>
+                  </a:lnTo>
+                  <a:lnTo>
+                    <a:pt x="5170920" y="3331964"/>
+                  </a:lnTo>
+                  <a:lnTo>
+                    <a:pt x="5242542" y="3338410"/>
+                  </a:lnTo>
+                  <a:lnTo>
+                    <a:pt x="5314165" y="3344583"/>
+                  </a:lnTo>
+                  <a:lnTo>
+                    <a:pt x="5385787" y="3350493"/>
+                  </a:lnTo>
+                  <a:lnTo>
+                    <a:pt x="5457410" y="3356152"/>
+                  </a:lnTo>
+                  <a:lnTo>
+                    <a:pt x="5529032" y="3361571"/>
+                  </a:lnTo>
+                  <a:lnTo>
+                    <a:pt x="5600655" y="3366760"/>
+                  </a:lnTo>
+                  <a:lnTo>
+                    <a:pt x="5672277" y="3371729"/>
+                  </a:lnTo>
+                  <a:lnTo>
+                    <a:pt x="5743900" y="3376486"/>
+                  </a:lnTo>
+                  <a:lnTo>
+                    <a:pt x="5815522" y="3381041"/>
+                  </a:lnTo>
+                  <a:lnTo>
+                    <a:pt x="5887145" y="3385403"/>
+                  </a:lnTo>
+                  <a:lnTo>
+                    <a:pt x="5958767" y="3389580"/>
+                  </a:lnTo>
+                  <a:lnTo>
+                    <a:pt x="6030390" y="3393579"/>
+                  </a:lnTo>
+                  <a:lnTo>
+                    <a:pt x="6102012" y="3397409"/>
+                  </a:lnTo>
+                  <a:lnTo>
+                    <a:pt x="6173635" y="3401076"/>
+                  </a:lnTo>
+                  <a:lnTo>
+                    <a:pt x="6245258" y="3404587"/>
+                  </a:lnTo>
+                  <a:lnTo>
+                    <a:pt x="6316880" y="3407949"/>
                   </a:lnTo>
                 </a:path>
               </a:pathLst>
@@ -4876,7 +4879,7 @@
           </p:nvSpPr>
           <p:spPr>
             <a:xfrm>
-              <a:off x="4313661" y="2073503"/>
+              <a:off x="4313914" y="2073503"/>
               <a:ext cx="0" cy="3649639"/>
             </a:xfrm>
             <a:custGeom>
@@ -5149,7 +5152,7 @@
           </p:nvSpPr>
           <p:spPr>
             <a:xfrm>
-              <a:off x="1343342" y="5785772"/>
+              <a:off x="1344940" y="5785772"/>
               <a:ext cx="161574" cy="80101"/>
             </a:xfrm>
             <a:prstGeom prst="rect">
@@ -5195,7 +5198,7 @@
           </p:nvSpPr>
           <p:spPr>
             <a:xfrm>
-              <a:off x="2280620" y="5785772"/>
+              <a:off x="2281218" y="5785772"/>
               <a:ext cx="161574" cy="80101"/>
             </a:xfrm>
             <a:prstGeom prst="rect">
@@ -5241,7 +5244,7 @@
           </p:nvSpPr>
           <p:spPr>
             <a:xfrm>
-              <a:off x="3217897" y="5785772"/>
+              <a:off x="3217496" y="5785772"/>
               <a:ext cx="161574" cy="80101"/>
             </a:xfrm>
             <a:prstGeom prst="rect">
@@ -5287,7 +5290,7 @@
           </p:nvSpPr>
           <p:spPr>
             <a:xfrm>
-              <a:off x="4204872" y="5785772"/>
+              <a:off x="4203472" y="5785772"/>
               <a:ext cx="62179" cy="80101"/>
             </a:xfrm>
             <a:prstGeom prst="rect">
@@ -5333,7 +5336,7 @@
           </p:nvSpPr>
           <p:spPr>
             <a:xfrm>
-              <a:off x="5111060" y="5785772"/>
+              <a:off x="5108660" y="5785772"/>
               <a:ext cx="124358" cy="80101"/>
             </a:xfrm>
             <a:prstGeom prst="rect">
@@ -5379,7 +5382,7 @@
           </p:nvSpPr>
           <p:spPr>
             <a:xfrm>
-              <a:off x="6048338" y="5785772"/>
+              <a:off x="6044938" y="5785772"/>
               <a:ext cx="124358" cy="80101"/>
             </a:xfrm>
             <a:prstGeom prst="rect">
@@ -5425,7 +5428,7 @@
           </p:nvSpPr>
           <p:spPr>
             <a:xfrm>
-              <a:off x="6985615" y="5785772"/>
+              <a:off x="6981216" y="5785772"/>
               <a:ext cx="124358" cy="80101"/>
             </a:xfrm>
             <a:prstGeom prst="rect">
@@ -5471,7 +5474,7 @@
           </p:nvSpPr>
           <p:spPr>
             <a:xfrm>
-              <a:off x="7922893" y="5785772"/>
+              <a:off x="7917494" y="5785772"/>
               <a:ext cx="124358" cy="80101"/>
             </a:xfrm>
             <a:prstGeom prst="rect">
@@ -5642,7 +5645,7 @@
                   <a:latin typeface="Helvetica"/>
                   <a:cs typeface="Helvetica"/>
                 </a:rPr>
-                <a:t>subHR per 10 % decline: 1.77 (1.26-2.50), p_Bonf = 0.006 (n = 6)  |  per IQR decline (Δ = 25.8 %): 4.40 (1.81-10.70)  |  IQR: [-10.7, 15.1] %</a:t>
+                <a:t>subHR per 10 % decline: 1.76 (1.25-2.48), p_Bonf = 0.007 (n = 6)  |  per IQR decline (Δ = 25.8 %): 4.32 (1.79-10.42)  |  IQR: [-10.6, 15.2] %</a:t>
               </a:r>
             </a:p>
           </p:txBody>
